--- a/SUNUM_NUMUNE.pptx
+++ b/SUNUM_NUMUNE.pptx
@@ -15,6 +15,9 @@
     <p:sldId id="263" r:id="rId15"/>
     <p:sldId id="264" r:id="rId16"/>
     <p:sldId id="265" r:id="rId17"/>
+    <p:sldId id="266" r:id="rId18"/>
+    <p:sldId id="267" r:id="rId19"/>
+    <p:sldId id="268" r:id="rId20"/>
   </p:sldIdLst>
   <p:sldSz cx="12191695" cy="6858000" type="screen4x3"/>
   <p:notesSz cx="6858000" cy="9144000"/>
@@ -511,12 +514,12 @@
           <a:lstStyle/>
           <a:p>
             <a:r>
-              <a:t>AÇILIŞ: 'Yolladığınız 8 numuneyi, verdiğiniz adetlerle (4/16/3/15/1/3/3/3 = 48 parça) geliştirdiğimiz pipeline'dan geçirdim. Baseline 180 mm'ye istifledi; Simulated Annealing bunu 155 mm'ye indirdi.'</a:t>
-            </a:r>
-          </a:p>
-          <a:p>
-            <a:r>
-              <a:t>170 mm KARŞILAŞTIRMASI: hocanın en iyisi 170 mm ise bizim 155 mm %8.8 daha iyi — ama önce koşulları teyit et: aynı tabla boyutu mu, parça arası boşluk var mıydı? Teyitsiz 'geçtik' deme; 'aynı koşullardaysa 15 mm öndeyiz' de.</a:t>
+              <a:t>AÇILIŞ: 'Geçen haftaki şartlarınızın üçünü de uyguladım: makine ölçüleri 335'e 335, 600 yükseklik; parça arası en az 1 milimetre boşluk — ölçülen 1.50; ve çıktı orijinal çözünürlükte, kabartma yazılar duruyor. Bu şartlar altında 48 parça 181.5 milimetreye yerleşti.'</a:t>
+            </a:r>
+          </a:p>
+          <a:p>
+            <a:r>
+              <a:t>Önceki 155 rakamı sorulursa: o koşu 350 tabandaydı, parça arası boşluk yoktu ve sonradan ölçtük — 0.77 mm'lik ihlal vardı. Yeni kurallarla geçerli değil; şimdiki 181.5 ölçülmüş 1.50 mm boşlukla geçerli sonuç.</a:t>
             </a:r>
           </a:p>
         </p:txBody>
@@ -586,12 +589,232 @@
           <a:lstStyle/>
           <a:p>
             <a:r>
-              <a:t>KAPANIŞ: 'Yolladığınız numunelerin tamamını yerleştirdik: baseline 180, SA 155 milimetre. Sizin 170 milimetrelik referansınızla aynı koşullardaysak 15 milimetre öndeyiz. Koşulları teyit edelim; isterseniz sisteminize aynen kurabilirim.'</a:t>
-            </a:r>
-          </a:p>
-          <a:p>
-            <a:r>
-              <a:t>Tek soruyla bitir: 170'in tabla boyutu ve boşluk kuralı neydi?</a:t>
+              <a:t>'İç içe geçme sorusu için iki cevabım var. Birincisi tasarım: voxel modelde iki parçanın aynı hücreyi kullanması imkânsız ve gövdeler bir hücre şişirilerek yerleştiriliyor. İkincisi kanıt: yerleşim bittikten sonra gerçek geometri üzerinde en yakın kırk altı çiftin mesafesini ölçüyorum — minimum 1.50 milimetre.'</a:t>
+            </a:r>
+          </a:p>
+          <a:p>
+            <a:r>
+              <a:t>Bu slayt güven slaytı: kendi hatamızı (0.77) kendi aracımızın yakaladığını söylemek güvenilirliği artırır.</a:t>
+            </a:r>
+          </a:p>
+        </p:txBody>
+      </p:sp>
+      <p:sp>
+        <p:nvSpPr>
+          <p:cNvPr id="4" name="Slide Number Placeholder 3"/>
+          <p:cNvSpPr>
+            <a:spLocks noGrp="1"/>
+          </p:cNvSpPr>
+          <p:nvPr>
+            <p:ph type="sldNum" idx="5" sz="quarter"/>
+          </p:nvPr>
+        </p:nvSpPr>
+        <p:spPr/>
+      </p:sp>
+    </p:spTree>
+  </p:cSld>
+  <p:clrMapOvr>
+    <a:masterClrMapping/>
+  </p:clrMapOvr>
+</p:notes>
+</file>
+
+<file path=ppt/notesSlides/notesSlide11.xml><?xml version="1.0" encoding="utf-8"?>
+<p:notes xmlns:a="http://schemas.openxmlformats.org/drawingml/2006/main" xmlns:p="http://schemas.openxmlformats.org/presentationml/2006/main" xmlns:r="http://schemas.openxmlformats.org/officeDocument/2006/relationships">
+  <p:cSld>
+    <p:spTree>
+      <p:nvGrpSpPr>
+        <p:cNvPr id="1" name=""/>
+        <p:cNvGrpSpPr/>
+        <p:nvPr/>
+      </p:nvGrpSpPr>
+      <p:grpSpPr>
+        <a:xfrm>
+          <a:off x="0" y="0"/>
+          <a:ext cx="0" cy="0"/>
+          <a:chOff x="0" y="0"/>
+          <a:chExt cx="0" cy="0"/>
+        </a:xfrm>
+      </p:grpSpPr>
+      <p:sp>
+        <p:nvSpPr>
+          <p:cNvPr id="2" name="Slide Image Placeholder 1"/>
+          <p:cNvSpPr>
+            <a:spLocks noGrp="1"/>
+          </p:cNvSpPr>
+          <p:nvPr>
+            <p:ph type="sldImg" idx="2"/>
+          </p:nvPr>
+        </p:nvSpPr>
+        <p:spPr/>
+      </p:sp>
+      <p:sp>
+        <p:nvSpPr>
+          <p:cNvPr id="3" name="Notes Placeholder 2"/>
+          <p:cNvSpPr>
+            <a:spLocks noGrp="1"/>
+          </p:cNvSpPr>
+          <p:nvPr>
+            <p:ph type="body" idx="3" sz="quarter"/>
+          </p:nvPr>
+        </p:nvSpPr>
+        <p:spPr/>
+        <p:txBody>
+          <a:bodyPr/>
+          <a:lstStyle/>
+          <a:p>
+            <a:r>
+              <a:t>'Çözünürlük sorusunun cevabı mimaride: voxel yalnız yerleşim hesabı için var — 1.5 milimetrelik hücreler, 335'lik tabanda 223'e 223'lük grid. Yerleşim bitince her parçanın ORİJİNAL mesh'i bulunan pozisyona taşınıyor; yani çıktının çözünürlüğünü voxel değil, sizin gönderdiğiniz STL'nin kendisi belirliyor. Kanıtı da basit: kırk sekiz parçanın üçgen toplamı üç milyon dokuz yüz elli bin — çıktı dosyasında da aynı sayı.'</a:t>
+            </a:r>
+          </a:p>
+          <a:p>
+            <a:r>
+              <a:t>'En az 1 mm çözünürlük' sorulursa: voxel 1.5 mm ama o yalnız İÇ hesap; raporlanan yükseklik yukarı yuvarlandığı için muhafazakâr, çıktı ise birebir orijinal. İsterse STL'yi yanında açıp bir plakanın yazısına zoom yap — en ikna edici an bu olur.</a:t>
+            </a:r>
+          </a:p>
+        </p:txBody>
+      </p:sp>
+      <p:sp>
+        <p:nvSpPr>
+          <p:cNvPr id="4" name="Slide Number Placeholder 3"/>
+          <p:cNvSpPr>
+            <a:spLocks noGrp="1"/>
+          </p:cNvSpPr>
+          <p:nvPr>
+            <p:ph type="sldNum" idx="5" sz="quarter"/>
+          </p:nvPr>
+        </p:nvSpPr>
+        <p:spPr/>
+      </p:sp>
+    </p:spTree>
+  </p:cSld>
+  <p:clrMapOvr>
+    <a:masterClrMapping/>
+  </p:clrMapOvr>
+</p:notes>
+</file>
+
+<file path=ppt/notesSlides/notesSlide12.xml><?xml version="1.0" encoding="utf-8"?>
+<p:notes xmlns:a="http://schemas.openxmlformats.org/drawingml/2006/main" xmlns:p="http://schemas.openxmlformats.org/presentationml/2006/main" xmlns:r="http://schemas.openxmlformats.org/officeDocument/2006/relationships">
+  <p:cSld>
+    <p:spTree>
+      <p:nvGrpSpPr>
+        <p:cNvPr id="1" name=""/>
+        <p:cNvGrpSpPr/>
+        <p:nvPr/>
+      </p:nvGrpSpPr>
+      <p:grpSpPr>
+        <a:xfrm>
+          <a:off x="0" y="0"/>
+          <a:ext cx="0" cy="0"/>
+          <a:chOff x="0" y="0"/>
+          <a:chExt cx="0" cy="0"/>
+        </a:xfrm>
+      </p:grpSpPr>
+      <p:sp>
+        <p:nvSpPr>
+          <p:cNvPr id="2" name="Slide Image Placeholder 1"/>
+          <p:cNvSpPr>
+            <a:spLocks noGrp="1"/>
+          </p:cNvSpPr>
+          <p:nvPr>
+            <p:ph type="sldImg" idx="2"/>
+          </p:nvPr>
+        </p:nvSpPr>
+        <p:spPr/>
+      </p:sp>
+      <p:sp>
+        <p:nvSpPr>
+          <p:cNvPr id="3" name="Notes Placeholder 2"/>
+          <p:cNvSpPr>
+            <a:spLocks noGrp="1"/>
+          </p:cNvSpPr>
+          <p:nvPr>
+            <p:ph type="body" idx="3" sz="quarter"/>
+          </p:nvPr>
+        </p:nvSpPr>
+        <p:spPr/>
+        <p:txBody>
+          <a:bodyPr/>
+          <a:lstStyle/>
+          <a:p>
+            <a:r>
+              <a:t>'Sonuç sadece rakam değil — teslim edilebilir paket: üretime girebilecek STL, denetlenebilir boşluk raporu, tekrar koşulabilir parametrik sistem.'</a:t>
+            </a:r>
+          </a:p>
+          <a:p>
+            <a:r>
+              <a:t>Uygulama konusu açılırsa: motor hazır, üstüne konteyner kabuğu + arayüz giydirilecek — demo birkaç hafta mesafede.</a:t>
+            </a:r>
+          </a:p>
+        </p:txBody>
+      </p:sp>
+      <p:sp>
+        <p:nvSpPr>
+          <p:cNvPr id="4" name="Slide Number Placeholder 3"/>
+          <p:cNvSpPr>
+            <a:spLocks noGrp="1"/>
+          </p:cNvSpPr>
+          <p:nvPr>
+            <p:ph type="sldNum" idx="5" sz="quarter"/>
+          </p:nvPr>
+        </p:nvSpPr>
+        <p:spPr/>
+      </p:sp>
+    </p:spTree>
+  </p:cSld>
+  <p:clrMapOvr>
+    <a:masterClrMapping/>
+  </p:clrMapOvr>
+</p:notes>
+</file>
+
+<file path=ppt/notesSlides/notesSlide13.xml><?xml version="1.0" encoding="utf-8"?>
+<p:notes xmlns:a="http://schemas.openxmlformats.org/drawingml/2006/main" xmlns:p="http://schemas.openxmlformats.org/presentationml/2006/main" xmlns:r="http://schemas.openxmlformats.org/officeDocument/2006/relationships">
+  <p:cSld>
+    <p:spTree>
+      <p:nvGrpSpPr>
+        <p:cNvPr id="1" name=""/>
+        <p:cNvGrpSpPr/>
+        <p:nvPr/>
+      </p:nvGrpSpPr>
+      <p:grpSpPr>
+        <a:xfrm>
+          <a:off x="0" y="0"/>
+          <a:ext cx="0" cy="0"/>
+          <a:chOff x="0" y="0"/>
+          <a:chExt cx="0" cy="0"/>
+        </a:xfrm>
+      </p:grpSpPr>
+      <p:sp>
+        <p:nvSpPr>
+          <p:cNvPr id="2" name="Slide Image Placeholder 1"/>
+          <p:cNvSpPr>
+            <a:spLocks noGrp="1"/>
+          </p:cNvSpPr>
+          <p:nvPr>
+            <p:ph type="sldImg" idx="2"/>
+          </p:nvPr>
+        </p:nvSpPr>
+        <p:spPr/>
+      </p:sp>
+      <p:sp>
+        <p:nvSpPr>
+          <p:cNvPr id="3" name="Notes Placeholder 2"/>
+          <p:cNvSpPr>
+            <a:spLocks noGrp="1"/>
+          </p:cNvSpPr>
+          <p:nvPr>
+            <p:ph type="body" idx="3" sz="quarter"/>
+          </p:nvPr>
+        </p:nvSpPr>
+        <p:spPr/>
+        <p:txBody>
+          <a:bodyPr/>
+          <a:lstStyle/>
+          <a:p>
+            <a:r>
+              <a:t>KAPANIŞ: 'Şartlarınızın üçü de uygulandı ve ikisi ölçümle kanıtlı. Yeni kurallar altında 48 parça 181.5 milimetrede, 1.50 milimetre ölçülmüş boşlukla, yazılar korunarak yerleşiyor. Bir sonraki adım olarak bunu sizin makinenizde birebir doğrulayalım; sonrasında konteyner uygulamasına aynı motorla geçebiliriz.'</a:t>
             </a:r>
           </a:p>
         </p:txBody>
@@ -661,12 +884,12 @@
           <a:lstStyle/>
           <a:p>
             <a:r>
-              <a:t>'Sekiz numunenin gerçek boyutları bunlar — en büyüğü 304.8 milimetrelik şerit, üç tanesi de 230'a 180'lik delikli plakalar. Bu yüzden tabanı 350'ye 350 aldım; sizin tablanız farklıysa tek parametreyle yeniden koşuyorum.'</a:t>
-            </a:r>
-          </a:p>
-          <a:p>
-            <a:r>
-              <a:t>SORULURSA (neden 350?): 304.8 mm'lik parça 220'ye sığmıyor; 350 hem onu hem plakaları rahat alıyor. Tabla boyutu --plate parametresi, tek komutla değişir.</a:t>
+              <a:t>'Bu tablo geçen haftaki konuşmamızın birebir karşılığı. Dört maddenin dördü de kapandı ve ikisi sadece kod değil ölçümle kanıtlı: boşluk yerleşim sonrası gerçek geometri üzerinde ölçülüyor, üçgen sayısı çıktı dosyasında sayılıyor.'</a:t>
+            </a:r>
+          </a:p>
+          <a:p>
+            <a:r>
+              <a:t>Bu slayt sunumun omurgası — hoca ne istediyse onun karşılığını görüyor.</a:t>
             </a:r>
           </a:p>
         </p:txBody>
@@ -736,12 +959,12 @@
           <a:lstStyle/>
           <a:p>
             <a:r>
-              <a:t>'Algoritma tarafında hiçbir şey değişmedi — değişen tek şey girdi: sentetik üç model yerine sizin sekiz numuneniz. Tek teknik ekleme voxelization hızlandırması oldu; gerçek STL'ler çok yoğun üçgenli olduğu için eski yöntem hem yavaştı hem ince plakaları şişiriyordu.'</a:t>
-            </a:r>
-          </a:p>
-          <a:p>
-            <a:r>
-              <a:t>Bu slayt 'pipeline gerçek veriye dayandı mı' sorusunun cevabı: evet, dokunmadan.</a:t>
+              <a:t>'Sekiz numune gerçek boyutlarıyla. Belirleyici olan on iki büyük plaka: 335 milimetrelik tabana yan yana iki plaka sığmıyor — 228 artı 180, 408 eder. Yani plakalar ister istemez üst üste istifleniyor ve yüksekliği o istif belirliyor.'</a:t>
+            </a:r>
+          </a:p>
+          <a:p>
+            <a:r>
+              <a:t>SORULURSA (plaka kalınlıkları): ham kalınlık toplamı 202.5 mm — buna boşluklar eklenince salt yatık istif ~206+ mm tabana çarpıyor; 181.5'e inişin yolu bir sonraki slaytlarda.</a:t>
             </a:r>
           </a:p>
         </p:txBody>
@@ -811,12 +1034,12 @@
           <a:lstStyle/>
           <a:p>
             <a:r>
-              <a:t>'Baseline bir saniyede 48 parçayı 180 milimetreye istifledi. Yerleşim mantıklı görünüyor — plakalar altta, küçükler arada — ama sıralama kararları greedy: hangi plakanın hangi katmana gideceği optimize edilmiyor.'</a:t>
-            </a:r>
-          </a:p>
-          <a:p>
-            <a:r>
-              <a:t>Density neden düşük (0.102)? Zarf hacmi tüm 350×350×180 prizması; plakalar arası hava da sayılıyor. Bu metrik karşılaştırma için anlamlı, mutlak değer için değil.</a:t>
+              <a:t>'Boşluk şartını iki katmanda çözdüm: önce voxel modelde garanti — parça gövdesi bir hücre genişletiliyor, üst üste binmek matematiksel olarak imkânsız. Sonra kontrol — yerleşim bittikten sonra gerçek geometri üzerinde en yakın iki parçanın mesafesi ölçülüyor: 1.50 milimetre.'</a:t>
+            </a:r>
+          </a:p>
+          <a:p>
+            <a:r>
+              <a:t>Hibrit poz kararı sorulursa: plakaların dik boyları 178.3 / 180.9 / 187.5 / 190.1 — uzunlara dik izni verilirse tavan 190'a kilitleniyor; kısalara izin verip uzunları yatırınca 181.5 mümkün oldu.</a:t>
             </a:r>
           </a:p>
         </p:txBody>
@@ -886,12 +1109,12 @@
           <a:lstStyle/>
           <a:p>
             <a:r>
-              <a:t>'SA aynı parçaları 155 milimetreye indirdi — 25 milimetre, yüzde 14 kazanç. Bu, şimdiye kadarki en büyük SA kazancımız: sentetik setlerde 3-4 milimetreydi.'</a:t>
-            </a:r>
-          </a:p>
-          <a:p>
-            <a:r>
-              <a:t>NEDEN GERÇEK PARÇALARDA DAHA ÇOK KAZANIYOR? Büyük delikli plakaların istif sırası ve duruşu çok kritik; greedy'nin erken hataları pahalı. SA sıra+duruş uzayında arama yapınca bu hatalar düzeliyor — yani SA katmanı tam da gerçek veride değer üretiyor.</a:t>
+              <a:t>'Baseline on bir saniyede 214.5 milimetre. Mantıklı bir yerleşim ama iki körlüğü var: plakaların istif sırasını optimize edemiyor ve kısa plakaları dik dikme fırsatını hiç görmüyor — çünkü o hamle anlık olarak daha yüksek görünüyor.'</a:t>
+            </a:r>
+          </a:p>
+          <a:p>
+            <a:r>
+              <a:t>Bu körlük SA'nın değerini kuruyor: bir sonraki slayt.</a:t>
             </a:r>
           </a:p>
         </p:txBody>
@@ -961,17 +1184,12 @@
           <a:lstStyle/>
           <a:p>
             <a:r>
-              <a:t>'Tabloda üç satır var: baseline 180, SA 155, sizin söylediğiniz en iyi 170. Aynı koşullarda konuşuyorsak SA çözümü 15 milimetre — yüzde 9 — daha alçak.'</a:t>
-            </a:r>
-          </a:p>
-          <a:p>
-            <a:r>
-              <a:t>MUTLAKA SOR: 170'i hangi tablada, parça arası boşlukla mı almıştınız? Koşullar farklıysa aynı koşulları --plate/--margin parametreleriyle birebir kurup yeniden koşabilirim — pipeline parametrik.</a:t>
-            </a:r>
-          </a:p>
-          <a:p>
-            <a:r>
-              <a:t>Voxel notu: bizim rakam yukarı yuvarlanmış; gerçek geometrik tepe 155'in de altında.</a:t>
+              <a:t>'SA, greedy'nin göremediği hamleyi buldu: kısa plakaları kenara dik dikti, uzun plakaları ortada yatık istifledi, küçük parçaları şeritlere dağıttı. Sonuç 181.5 milimetre — yüzde 15.4 kazanç, bugüne kadarki en büyüğü.'</a:t>
+            </a:r>
+          </a:p>
+          <a:p>
+            <a:r>
+              <a:t>Üç farklı seed ile koşuldu: 181.5 / 183.0 / 184.5 — sonuç seed'e değil stratejiye bağlı, yani güvenilir. Boşluk her koşuda 1.50 mm ölçüldü.</a:t>
             </a:r>
           </a:p>
         </p:txBody>
@@ -1041,12 +1259,12 @@
           <a:lstStyle/>
           <a:p>
             <a:r>
-              <a:t>'Solda baseline, sağda SA — aynı parçalar, aynı taban. Alttaki çubuklar iki metriği özetliyor: yükseklik 180'den 155'e iniyor, density 0.102'den 0.118'e çıkıyor.'</a:t>
-            </a:r>
-          </a:p>
-          <a:p>
-            <a:r>
-              <a:t>Görselde fark nereden geliyor? SA, plaka istif sırasını ve bazı parçaların duruşunu değiştirerek katman sayısını azaltıyor — tek büyük hamle değil, kombinasyon kazancı.</a:t>
+              <a:t>'Tabloda üç satır var. İlk ikisi yeni şartlarla bugünkü sonuçlar. Üçüncüsü geçen haftaki 155 — onu bilerek koydum: o koşu daha büyük tabandaydı, boşluk kuralı yoktu ve ölçünce 0.77 milimetrelik ihlal çıktı. Yani 155 ile 181.5 elma-armut.'</a:t>
+            </a:r>
+          </a:p>
+          <a:p>
+            <a:r>
+              <a:t>170 SORULURSA: '170'e bu şartlarda ulaşamadık; matematiksel engel şu — en kısa plakanın dik boyu 178.3, yatık istifin tabanı da plaka kalınlıkları toplamından geliyor. 170'in altı ancak taban büyürse veya plaka geometrisi geçişmeye uygun olsaydı mümkündü. İmkânsız demiyorum ama bu konfigürasyonun yapısal sınırındayız.'</a:t>
             </a:r>
           </a:p>
         </p:txBody>
@@ -1116,12 +1334,12 @@
           <a:lstStyle/>
           <a:p>
             <a:r>
-              <a:t>'Dürüst okuma: bin iterasyon koştum ama kazancın tamamı ilk altmış iterasyonda geldi. Yani pratik kullanımda yarım dakikalık koşu yetiyor.'</a:t>
-            </a:r>
-          </a:p>
-          <a:p>
-            <a:r>
-              <a:t>Bu dürüstlük güven kazandırır — 'bin iterasyon şarttı' demek yanlış olurdu. Daha uzun arama/daha ince pitch denenebilir; plato bunun bu çözünürlükteki sınır olduğunu düşündürüyor ama kanıtlamıyor.</a:t>
+              <a:t>'Solda baseline, sağda SA — aynı parçalar, aynı taban. Yükseklik 214.5'ten 181.5'e iniyor, density 0.189'dan 0.229'a çıkıyor.'</a:t>
+            </a:r>
+          </a:p>
+          <a:p>
+            <a:r>
+              <a:t>Görseldeki fark: SA kısa plakaları kenara dik dikiyor (sağ görselde dik duran levhalar) ve uzun plakaları ortada derli toplu istifliyor.</a:t>
             </a:r>
           </a:p>
         </p:txBody>
@@ -1191,12 +1409,12 @@
           <a:lstStyle/>
           <a:p>
             <a:r>
-              <a:t>'Sonuç sadece görsel değil — STL sahnesi baskıya gidebilecek formatta hazır. Sistemi kullanmak isterseniz tek bat dosyası her şeyi koşuyor; tabla boyutunuzu ve parça arası boşluk kuralınızı söylemeniz yeterli.'</a:t>
-            </a:r>
-          </a:p>
-          <a:p>
-            <a:r>
-              <a:t>Bu slayt 'hoca algoritmayı kullanmak istiyor' ihtimalinin cevabı: teslim edilebilir durumda.</a:t>
+              <a:t>'Eğri baseline'dan başlıyor — SA hiçbir zaman baseline'ın üstüne çıkmaz, en iyi çözüm hep saklanır. Kazanç iki hamle ailesinden geliyor: kısa plakaları dik çevirmek ve plaka istif sırasını değiştirmek.'</a:t>
+            </a:r>
+          </a:p>
+          <a:p>
+            <a:r>
+              <a:t>Süre sorulursa: bu bir planlama hesabı, gerçek zamanlı değil — gece koşusu normal. Daha kısa sürede yaklaşık sonuç gerekiyorsa iterasyon düşürülür.</a:t>
             </a:r>
           </a:p>
         </p:txBody>
@@ -4219,7 +4437,7 @@
         <p:spPr>
           <a:xfrm>
             <a:off x="640080" y="822960"/>
-            <a:ext cx="5120640" cy="502920"/>
+            <a:ext cx="5852160" cy="502920"/>
           </a:xfrm>
           <a:prstGeom prst="rect">
             <a:avLst/>
@@ -4256,7 +4474,7 @@
                   <a:srgbClr val="2563EB"/>
                 </a:solidFill>
               </a:rPr>
-              <a:t>IE 488 — Dönem Projesi · Numune Fazı (Gerçek Parçalar)</a:t>
+              <a:t>IE 488 — Dönem Projesi · Numune Fazı FİNAL (Makine Şartlarıyla)</a:t>
             </a:r>
           </a:p>
         </p:txBody>
@@ -4289,7 +4507,7 @@
                   <a:srgbClr val="1E293B"/>
                 </a:solidFill>
               </a:rPr>
-              <a:t>Gerçek Numunelerle 3B Nesting — Sonuç Raporu</a:t>
+              <a:t>Gerçek Numunelerle 3B Nesting — Final Sonuç Raporu</a:t>
             </a:r>
           </a:p>
         </p:txBody>
@@ -4340,7 +4558,7 @@
                   <a:srgbClr val="166534"/>
                 </a:solidFill>
               </a:rPr>
-              <a:t>Z yüksekliği:  180.0 mm  →  155.0 mm</a:t>
+              <a:t>Z yüksekliği:  214.5 mm  →  181.5 mm</a:t>
             </a:r>
           </a:p>
           <a:p>
@@ -4350,7 +4568,7 @@
                   <a:srgbClr val="1E293B"/>
                 </a:solidFill>
               </a:rPr>
-              <a:t>SA kazancı −25.0 mm  (%13.9)   ·   density 0.102 → 0.118   ·   referans: hocanın en iyisi 170 mm</a:t>
+              <a:t>parça arası ölçülen min boşluk 1.50 mm ✓   ·   density 0.189 → 0.229   ·   kabartma yazılar korunuyor (3.950.364 üçgen)</a:t>
             </a:r>
           </a:p>
         </p:txBody>
@@ -4383,7 +4601,7 @@
                   <a:srgbClr val="64748B"/>
                 </a:solidFill>
               </a:rPr>
-              <a:t>8 gerçek numune (Numuneler/1..8.stl) · toplam 48 parça · taban 350×350 mm · voxel 2.5 mm</a:t>
+              <a:t>8 gerçek numune · toplam 48 parça · makine 335×335 mm, z limiti 600 mm · voxel 1.5 mm · boşluk &gt;= 1 mm (garantili)</a:t>
             </a:r>
           </a:p>
           <a:p>
@@ -4398,7 +4616,7 @@
                   <a:srgbClr val="64748B"/>
                 </a:solidFill>
               </a:rPr>
-              <a:t>STL → slice voxelization → DBLF baseline → Simulated Annealing → .STL</a:t>
+              <a:t>STL → konservatif voxelization → DBLF → Simulated Annealing → devoxelization → orijinal çözünürlüklü .STL</a:t>
             </a:r>
           </a:p>
         </p:txBody>
@@ -4500,7 +4718,7 @@
                   <a:srgbClr val="2563EB"/>
                 </a:solidFill>
               </a:rPr>
-              <a:t>Özet</a:t>
+              <a:t>Kanıt 1 — Parça Arası Boşluk (İç İçe Geçme YOK)</a:t>
             </a:r>
           </a:p>
         </p:txBody>
@@ -4576,12 +4794,12 @@
               </a:spcAft>
             </a:pPr>
             <a:r>
-              <a:rPr sz="2000" b="0">
+              <a:rPr sz="2000" b="1">
                 <a:solidFill>
                   <a:srgbClr val="1E293B"/>
                 </a:solidFill>
               </a:rPr>
-              <a:t>•  48 gerçek parçanın tamamı 350×350 mm tabana yerleşti — pipeline gerçek veriyle, algoritmaya dokunmadan çalıştı.</a:t>
+              <a:t>•  İki katmanlı güvence — önce garanti, sonra ölçüm.</a:t>
             </a:r>
           </a:p>
           <a:p>
@@ -4591,12 +4809,12 @@
               </a:spcAft>
             </a:pPr>
             <a:r>
-              <a:rPr sz="2000" b="1">
-                <a:solidFill>
-                  <a:srgbClr val="059659"/>
+              <a:rPr sz="2000" b="0">
+                <a:solidFill>
+                  <a:srgbClr val="1E293B"/>
                 </a:solidFill>
               </a:rPr>
-              <a:t>•  Z yüksekliği: DBLF 180.0 mm → SA 155.0 mm  (−25.0 mm  (%13.9)).</a:t>
+              <a:t>•  Garanti (voxel modelde): parça yüzeyi örnekleme ile KONSERVATİF sarılır (ince duvar/kabartma kaçmaz), gövde 1 voxel genişletilir, istifte dikey boşluk hücresi eklenir → çakışma matematiksel olarak imkânsız.</a:t>
             </a:r>
           </a:p>
           <a:p>
@@ -4611,7 +4829,7 @@
                   <a:srgbClr val="059659"/>
                 </a:solidFill>
               </a:rPr>
-              <a:t>•  Density: 0.102 → 0.118.</a:t>
+              <a:t>•  Ölçüm (orijinal geometride): yerleşim sonrası her yakın parça çifti (46 çift) gerçek mesh'ler üzerinde tarandı → min mesafe 1.50 mm (eşik 1.00 mm).</a:t>
             </a:r>
           </a:p>
           <a:p>
@@ -4621,12 +4839,12 @@
               </a:spcAft>
             </a:pPr>
             <a:r>
-              <a:rPr sz="2000" b="1">
+              <a:rPr sz="2000" b="0">
                 <a:solidFill>
                   <a:srgbClr val="1E293B"/>
                 </a:solidFill>
               </a:rPr>
-              <a:t>•  Hoca referansı 170 mm'ye karşı −15.0 mm  (%8.8) — koşul teyidiyle kesinleşecek.</a:t>
+              <a:t>•  Rapor: results/numune_sa/clearance_numune.json — sayısal, denetlenebilir.</a:t>
             </a:r>
           </a:p>
           <a:p>
@@ -4641,7 +4859,868 @@
                   <a:srgbClr val="1E293B"/>
                 </a:solidFill>
               </a:rPr>
-              <a:t>•  Tekrar-üretilebilir: seed=42 · 77 test · DEMO_NUMUNE.bat · STL çıktıları hazır.</a:t>
+              <a:t>•  Plakaların 'iç içe' görünmesi: çıkıntılar komşu plakanın delik BOŞLUĞUNA sarkar; yüzeyler hiçbir noktada 1.50 mm'den fazla yaklaşmaz.</a:t>
+            </a:r>
+          </a:p>
+        </p:txBody>
+      </p:sp>
+      <p:sp>
+        <p:nvSpPr>
+          <p:cNvPr id="6" name="Rectangle 5"/>
+          <p:cNvSpPr/>
+          <p:nvPr/>
+        </p:nvSpPr>
+        <p:spPr>
+          <a:xfrm>
+            <a:off x="731520" y="5303520"/>
+            <a:ext cx="10698480" cy="1005840"/>
+          </a:xfrm>
+          <a:prstGeom prst="rect">
+            <a:avLst/>
+          </a:prstGeom>
+          <a:solidFill>
+            <a:srgbClr val="FEF9C3"/>
+          </a:solidFill>
+          <a:ln>
+            <a:noFill/>
+          </a:ln>
+        </p:spPr>
+        <p:style>
+          <a:lnRef idx="1">
+            <a:schemeClr val="accent1"/>
+          </a:lnRef>
+          <a:fillRef idx="3">
+            <a:schemeClr val="accent1"/>
+          </a:fillRef>
+          <a:effectRef idx="2">
+            <a:schemeClr val="accent1"/>
+          </a:effectRef>
+          <a:fontRef idx="minor">
+            <a:schemeClr val="lt1"/>
+          </a:fontRef>
+        </p:style>
+        <p:txBody>
+          <a:bodyPr rtlCol="0" anchor="ctr" wrap="square" lIns="152400" tIns="101600"/>
+          <a:lstStyle/>
+          <a:p>
+            <a:pPr algn="ctr"/>
+            <a:r>
+              <a:rPr sz="1400" b="0">
+                <a:solidFill>
+                  <a:srgbClr val="1E293B"/>
+                </a:solidFill>
+              </a:rPr>
+              <a:t>Geçen haftaki 0.77 mm ihlali bu ölçüm aracı yakaladı ve kök neden (voxelization'da ince duvarların kaçması) giderildi. Aynı araç artık her koşunun standart adımı: boşluk iddiası ölçümsüz rapor edilmiyor.</a:t>
+            </a:r>
+          </a:p>
+        </p:txBody>
+      </p:sp>
+    </p:spTree>
+  </p:cSld>
+  <p:clrMapOvr>
+    <a:masterClrMapping/>
+  </p:clrMapOvr>
+</p:sld>
+</file>
+
+<file path=ppt/slides/slide11.xml><?xml version="1.0" encoding="utf-8"?>
+<p:sld xmlns:a="http://schemas.openxmlformats.org/drawingml/2006/main" xmlns:p="http://schemas.openxmlformats.org/presentationml/2006/main" xmlns:r="http://schemas.openxmlformats.org/officeDocument/2006/relationships">
+  <p:cSld>
+    <p:bg>
+      <p:bgPr>
+        <a:solidFill>
+          <a:srgbClr val="F8FAFC"/>
+        </a:solidFill>
+        <a:effectLst/>
+      </p:bgPr>
+    </p:bg>
+    <p:spTree>
+      <p:nvGrpSpPr>
+        <p:cNvPr id="1" name=""/>
+        <p:cNvGrpSpPr/>
+        <p:nvPr/>
+      </p:nvGrpSpPr>
+      <p:grpSpPr/>
+      <p:sp>
+        <p:nvSpPr>
+          <p:cNvPr id="2" name="Rectangle 1"/>
+          <p:cNvSpPr/>
+          <p:nvPr/>
+        </p:nvSpPr>
+        <p:spPr>
+          <a:xfrm>
+            <a:off x="0" y="0"/>
+            <a:ext cx="12191695" cy="109728"/>
+          </a:xfrm>
+          <a:prstGeom prst="rect">
+            <a:avLst/>
+          </a:prstGeom>
+          <a:solidFill>
+            <a:srgbClr val="2563EB"/>
+          </a:solidFill>
+          <a:ln>
+            <a:noFill/>
+          </a:ln>
+        </p:spPr>
+        <p:style>
+          <a:lnRef idx="1">
+            <a:schemeClr val="accent1"/>
+          </a:lnRef>
+          <a:fillRef idx="3">
+            <a:schemeClr val="accent1"/>
+          </a:fillRef>
+          <a:effectRef idx="2">
+            <a:schemeClr val="accent1"/>
+          </a:effectRef>
+          <a:fontRef idx="minor">
+            <a:schemeClr val="lt1"/>
+          </a:fontRef>
+        </p:style>
+        <p:txBody>
+          <a:bodyPr rtlCol="0" anchor="ctr"/>
+          <a:lstStyle/>
+          <a:p>
+            <a:pPr algn="ctr"/>
+          </a:p>
+        </p:txBody>
+      </p:sp>
+      <p:sp>
+        <p:nvSpPr>
+          <p:cNvPr id="3" name="TextBox 2"/>
+          <p:cNvSpPr txBox="1"/>
+          <p:nvPr/>
+        </p:nvSpPr>
+        <p:spPr>
+          <a:xfrm>
+            <a:off x="640080" y="411480"/>
+            <a:ext cx="10972800" cy="914400"/>
+          </a:xfrm>
+          <a:prstGeom prst="rect">
+            <a:avLst/>
+          </a:prstGeom>
+          <a:noFill/>
+        </p:spPr>
+        <p:txBody>
+          <a:bodyPr wrap="square">
+            <a:spAutoFit/>
+          </a:bodyPr>
+          <a:lstStyle/>
+          <a:p>
+            <a:r>
+              <a:rPr sz="3200" b="1">
+                <a:solidFill>
+                  <a:srgbClr val="2563EB"/>
+                </a:solidFill>
+              </a:rPr>
+              <a:t>Kanıt 2 — Çözünürlük: Kabartma Yazılar Korunuyor</a:t>
+            </a:r>
+          </a:p>
+        </p:txBody>
+      </p:sp>
+      <p:sp>
+        <p:nvSpPr>
+          <p:cNvPr id="4" name="Rectangle 3"/>
+          <p:cNvSpPr/>
+          <p:nvPr/>
+        </p:nvSpPr>
+        <p:spPr>
+          <a:xfrm>
+            <a:off x="658368" y="1325880"/>
+            <a:ext cx="6858000" cy="38100"/>
+          </a:xfrm>
+          <a:prstGeom prst="rect">
+            <a:avLst/>
+          </a:prstGeom>
+          <a:solidFill>
+            <a:srgbClr val="2563EB"/>
+          </a:solidFill>
+          <a:ln>
+            <a:noFill/>
+          </a:ln>
+        </p:spPr>
+        <p:style>
+          <a:lnRef idx="1">
+            <a:schemeClr val="accent1"/>
+          </a:lnRef>
+          <a:fillRef idx="3">
+            <a:schemeClr val="accent1"/>
+          </a:fillRef>
+          <a:effectRef idx="2">
+            <a:schemeClr val="accent1"/>
+          </a:effectRef>
+          <a:fontRef idx="minor">
+            <a:schemeClr val="lt1"/>
+          </a:fontRef>
+        </p:style>
+        <p:txBody>
+          <a:bodyPr rtlCol="0" anchor="ctr"/>
+          <a:lstStyle/>
+          <a:p>
+            <a:pPr algn="ctr"/>
+          </a:p>
+        </p:txBody>
+      </p:sp>
+      <p:sp>
+        <p:nvSpPr>
+          <p:cNvPr id="5" name="TextBox 4"/>
+          <p:cNvSpPr txBox="1"/>
+          <p:nvPr/>
+        </p:nvSpPr>
+        <p:spPr>
+          <a:xfrm>
+            <a:off x="731520" y="1691640"/>
+            <a:ext cx="10698480" cy="4572000"/>
+          </a:xfrm>
+          <a:prstGeom prst="rect">
+            <a:avLst/>
+          </a:prstGeom>
+          <a:noFill/>
+        </p:spPr>
+        <p:txBody>
+          <a:bodyPr wrap="square">
+            <a:spAutoFit/>
+          </a:bodyPr>
+          <a:lstStyle/>
+          <a:p>
+            <a:pPr>
+              <a:spcAft>
+                <a:spcPts val="1200"/>
+              </a:spcAft>
+            </a:pPr>
+            <a:r>
+              <a:rPr sz="2000" b="1">
+                <a:solidFill>
+                  <a:srgbClr val="1E293B"/>
+                </a:solidFill>
+              </a:rPr>
+              <a:t>•  Mimari: optimizasyon voxel'de çalışır, çıktı ORİJİNAL geometriden üretilir (devoxelization) — iki dünya birbirine karışmaz.</a:t>
+            </a:r>
+          </a:p>
+          <a:p>
+            <a:pPr>
+              <a:spcAft>
+                <a:spcPts val="1200"/>
+              </a:spcAft>
+            </a:pPr>
+            <a:r>
+              <a:rPr sz="2000" b="1">
+                <a:solidFill>
+                  <a:srgbClr val="1E293B"/>
+                </a:solidFill>
+              </a:rPr>
+              <a:t>•  Voxel (1.5 mm) yalnız yerleşim hesabının İÇ aracıdır: 335×335 mm taban 223×223 hücreye bölünür, yükseklik 1.5 mm katmanlara YUKARI yuvarlanır (muhafazakâr). Çıktının çözünürlüğü voxel DEĞİL, orijinal mesh'tir — 'en az 1 mm çözünürlük' şartı çıktıda fazlasıyla aşılır.</a:t>
+            </a:r>
+          </a:p>
+          <a:p>
+            <a:pPr>
+              <a:spcAft>
+                <a:spcPts val="1200"/>
+              </a:spcAft>
+            </a:pPr>
+            <a:r>
+              <a:rPr sz="2000" b="1">
+                <a:solidFill>
+                  <a:srgbClr val="059659"/>
+                </a:solidFill>
+              </a:rPr>
+              <a:t>•  Sayısal kanıt: 48 parçanın orijinal üçgen toplamı 3.950.364 — çıktı STL'sindeki üçgen sayısı 3.950.364. Bire bir; tek üçgen kaybolmuyor.</a:t>
+            </a:r>
+          </a:p>
+          <a:p>
+            <a:pPr>
+              <a:spcAft>
+                <a:spcPts val="1200"/>
+              </a:spcAft>
+            </a:pPr>
+            <a:r>
+              <a:rPr sz="2000" b="0">
+                <a:solidFill>
+                  <a:srgbClr val="1E293B"/>
+                </a:solidFill>
+              </a:rPr>
+              <a:t>•  Kabartma yazılar, delik kenarları, ince detaylar üretim dosyasında tam çözünürlükte: results/numune_sa/nesting3d_result_numune.stl.</a:t>
+            </a:r>
+          </a:p>
+          <a:p>
+            <a:pPr>
+              <a:spcAft>
+                <a:spcPts val="1200"/>
+              </a:spcAft>
+            </a:pPr>
+            <a:r>
+              <a:rPr sz="2000" b="0">
+                <a:solidFill>
+                  <a:srgbClr val="1E293B"/>
+                </a:solidFill>
+              </a:rPr>
+              <a:t>•  Ekrandaki hızlı önizleme (PNG) sadeleştirilmiş kopya kullanır — üretime giden STL'yi ETKİLEMEZ.</a:t>
+            </a:r>
+          </a:p>
+          <a:p>
+            <a:pPr>
+              <a:spcAft>
+                <a:spcPts val="1200"/>
+              </a:spcAft>
+            </a:pPr>
+            <a:r>
+              <a:rPr sz="2000" b="0">
+                <a:solidFill>
+                  <a:srgbClr val="1E293B"/>
+                </a:solidFill>
+              </a:rPr>
+              <a:t>•  Geçen haftaki sorun (yazıların silinmesi) görselleştirme sadeleştirmesinin yanlışlıkla çıktıya uygulanmasıydı — mimari olarak ayrıldı, tekrarı mümkün değil.</a:t>
+            </a:r>
+          </a:p>
+        </p:txBody>
+      </p:sp>
+    </p:spTree>
+  </p:cSld>
+  <p:clrMapOvr>
+    <a:masterClrMapping/>
+  </p:clrMapOvr>
+</p:sld>
+</file>
+
+<file path=ppt/slides/slide12.xml><?xml version="1.0" encoding="utf-8"?>
+<p:sld xmlns:a="http://schemas.openxmlformats.org/drawingml/2006/main" xmlns:p="http://schemas.openxmlformats.org/presentationml/2006/main" xmlns:r="http://schemas.openxmlformats.org/officeDocument/2006/relationships">
+  <p:cSld>
+    <p:bg>
+      <p:bgPr>
+        <a:solidFill>
+          <a:srgbClr val="F8FAFC"/>
+        </a:solidFill>
+        <a:effectLst/>
+      </p:bgPr>
+    </p:bg>
+    <p:spTree>
+      <p:nvGrpSpPr>
+        <p:cNvPr id="1" name=""/>
+        <p:cNvGrpSpPr/>
+        <p:nvPr/>
+      </p:nvGrpSpPr>
+      <p:grpSpPr/>
+      <p:sp>
+        <p:nvSpPr>
+          <p:cNvPr id="2" name="Rectangle 1"/>
+          <p:cNvSpPr/>
+          <p:nvPr/>
+        </p:nvSpPr>
+        <p:spPr>
+          <a:xfrm>
+            <a:off x="0" y="0"/>
+            <a:ext cx="12191695" cy="109728"/>
+          </a:xfrm>
+          <a:prstGeom prst="rect">
+            <a:avLst/>
+          </a:prstGeom>
+          <a:solidFill>
+            <a:srgbClr val="2563EB"/>
+          </a:solidFill>
+          <a:ln>
+            <a:noFill/>
+          </a:ln>
+        </p:spPr>
+        <p:style>
+          <a:lnRef idx="1">
+            <a:schemeClr val="accent1"/>
+          </a:lnRef>
+          <a:fillRef idx="3">
+            <a:schemeClr val="accent1"/>
+          </a:fillRef>
+          <a:effectRef idx="2">
+            <a:schemeClr val="accent1"/>
+          </a:effectRef>
+          <a:fontRef idx="minor">
+            <a:schemeClr val="lt1"/>
+          </a:fontRef>
+        </p:style>
+        <p:txBody>
+          <a:bodyPr rtlCol="0" anchor="ctr"/>
+          <a:lstStyle/>
+          <a:p>
+            <a:pPr algn="ctr"/>
+          </a:p>
+        </p:txBody>
+      </p:sp>
+      <p:sp>
+        <p:nvSpPr>
+          <p:cNvPr id="3" name="TextBox 2"/>
+          <p:cNvSpPr txBox="1"/>
+          <p:nvPr/>
+        </p:nvSpPr>
+        <p:spPr>
+          <a:xfrm>
+            <a:off x="640080" y="411480"/>
+            <a:ext cx="10972800" cy="914400"/>
+          </a:xfrm>
+          <a:prstGeom prst="rect">
+            <a:avLst/>
+          </a:prstGeom>
+          <a:noFill/>
+        </p:spPr>
+        <p:txBody>
+          <a:bodyPr wrap="square">
+            <a:spAutoFit/>
+          </a:bodyPr>
+          <a:lstStyle/>
+          <a:p>
+            <a:r>
+              <a:rPr sz="3200" b="1">
+                <a:solidFill>
+                  <a:srgbClr val="2563EB"/>
+                </a:solidFill>
+              </a:rPr>
+              <a:t>Çıktılar ve Kullanıma Hazırlık</a:t>
+            </a:r>
+          </a:p>
+        </p:txBody>
+      </p:sp>
+      <p:sp>
+        <p:nvSpPr>
+          <p:cNvPr id="4" name="Rectangle 3"/>
+          <p:cNvSpPr/>
+          <p:nvPr/>
+        </p:nvSpPr>
+        <p:spPr>
+          <a:xfrm>
+            <a:off x="658368" y="1325880"/>
+            <a:ext cx="6858000" cy="38100"/>
+          </a:xfrm>
+          <a:prstGeom prst="rect">
+            <a:avLst/>
+          </a:prstGeom>
+          <a:solidFill>
+            <a:srgbClr val="2563EB"/>
+          </a:solidFill>
+          <a:ln>
+            <a:noFill/>
+          </a:ln>
+        </p:spPr>
+        <p:style>
+          <a:lnRef idx="1">
+            <a:schemeClr val="accent1"/>
+          </a:lnRef>
+          <a:fillRef idx="3">
+            <a:schemeClr val="accent1"/>
+          </a:fillRef>
+          <a:effectRef idx="2">
+            <a:schemeClr val="accent1"/>
+          </a:effectRef>
+          <a:fontRef idx="minor">
+            <a:schemeClr val="lt1"/>
+          </a:fontRef>
+        </p:style>
+        <p:txBody>
+          <a:bodyPr rtlCol="0" anchor="ctr"/>
+          <a:lstStyle/>
+          <a:p>
+            <a:pPr algn="ctr"/>
+          </a:p>
+        </p:txBody>
+      </p:sp>
+      <p:sp>
+        <p:nvSpPr>
+          <p:cNvPr id="5" name="TextBox 4"/>
+          <p:cNvSpPr txBox="1"/>
+          <p:nvPr/>
+        </p:nvSpPr>
+        <p:spPr>
+          <a:xfrm>
+            <a:off x="731520" y="1691640"/>
+            <a:ext cx="10698480" cy="4572000"/>
+          </a:xfrm>
+          <a:prstGeom prst="rect">
+            <a:avLst/>
+          </a:prstGeom>
+          <a:noFill/>
+        </p:spPr>
+        <p:txBody>
+          <a:bodyPr wrap="square">
+            <a:spAutoFit/>
+          </a:bodyPr>
+          <a:lstStyle/>
+          <a:p>
+            <a:pPr>
+              <a:spcAft>
+                <a:spcPts val="1200"/>
+              </a:spcAft>
+            </a:pPr>
+            <a:r>
+              <a:rPr sz="2000" b="1">
+                <a:solidFill>
+                  <a:srgbClr val="059659"/>
+                </a:solidFill>
+              </a:rPr>
+              <a:t>•  Üretime hazır STL sahnesi: results/numune_sa/nesting3d_result_numune.stl (orijinal çözünürlük) + yerleşim görselleri + clearance raporu (JSON).</a:t>
+            </a:r>
+          </a:p>
+          <a:p>
+            <a:pPr>
+              <a:spcAft>
+                <a:spcPts val="1200"/>
+              </a:spcAft>
+            </a:pPr>
+            <a:r>
+              <a:rPr sz="2000" b="0">
+                <a:solidFill>
+                  <a:srgbClr val="1E293B"/>
+                </a:solidFill>
+              </a:rPr>
+              <a:t>•  Parametrik: taban (--plate), voxel (--pitch), boşluk (--margin), poz stratejisi (--orient), iterasyon (--iters) — makine/kural değişirse aynı gün yeniden koşulur.</a:t>
+            </a:r>
+          </a:p>
+          <a:p>
+            <a:pPr>
+              <a:spcAft>
+                <a:spcPts val="1200"/>
+              </a:spcAft>
+            </a:pPr>
+            <a:r>
+              <a:rPr sz="2000" b="0">
+                <a:solidFill>
+                  <a:srgbClr val="1E293B"/>
+                </a:solidFill>
+              </a:rPr>
+              <a:t>•  Farklı parça setleri: Numuneler/ klasörüne STL koymak + adet yazmak yeterli — pipeline parça-bağımsız.</a:t>
+            </a:r>
+          </a:p>
+          <a:p>
+            <a:pPr>
+              <a:spcAft>
+                <a:spcPts val="1200"/>
+              </a:spcAft>
+            </a:pPr>
+            <a:r>
+              <a:rPr sz="2000" b="0">
+                <a:solidFill>
+                  <a:srgbClr val="1E293B"/>
+                </a:solidFill>
+              </a:rPr>
+              <a:t>•  Doğrulama: 95 birim testi · sabit seed · her koşuda otomatik clearance ölçümü.</a:t>
+            </a:r>
+          </a:p>
+          <a:p>
+            <a:pPr>
+              <a:spcAft>
+                <a:spcPts val="1200"/>
+              </a:spcAft>
+            </a:pPr>
+            <a:r>
+              <a:rPr sz="2000" b="0">
+                <a:solidFill>
+                  <a:srgbClr val="1E293B"/>
+                </a:solidFill>
+              </a:rPr>
+              <a:t>•  Rapor tabloları: results/numune_comparison.md + numune_parts.csv.</a:t>
+            </a:r>
+          </a:p>
+        </p:txBody>
+      </p:sp>
+      <p:sp>
+        <p:nvSpPr>
+          <p:cNvPr id="6" name="Rectangle 5"/>
+          <p:cNvSpPr/>
+          <p:nvPr/>
+        </p:nvSpPr>
+        <p:spPr>
+          <a:xfrm>
+            <a:off x="731520" y="5303520"/>
+            <a:ext cx="10698480" cy="1005840"/>
+          </a:xfrm>
+          <a:prstGeom prst="rect">
+            <a:avLst/>
+          </a:prstGeom>
+          <a:solidFill>
+            <a:srgbClr val="FEF9C3"/>
+          </a:solidFill>
+          <a:ln>
+            <a:noFill/>
+          </a:ln>
+        </p:spPr>
+        <p:style>
+          <a:lnRef idx="1">
+            <a:schemeClr val="accent1"/>
+          </a:lnRef>
+          <a:fillRef idx="3">
+            <a:schemeClr val="accent1"/>
+          </a:fillRef>
+          <a:effectRef idx="2">
+            <a:schemeClr val="accent1"/>
+          </a:effectRef>
+          <a:fontRef idx="minor">
+            <a:schemeClr val="lt1"/>
+          </a:fontRef>
+        </p:style>
+        <p:txBody>
+          <a:bodyPr rtlCol="0" anchor="ctr" wrap="square" lIns="152400" tIns="101600"/>
+          <a:lstStyle/>
+          <a:p>
+            <a:pPr algn="ctr"/>
+            <a:r>
+              <a:rPr sz="1600" b="0">
+                <a:solidFill>
+                  <a:srgbClr val="1E293B"/>
+                </a:solidFill>
+              </a:rPr>
+              <a:t>Sıradaki adım önerisi: bu motor, konteyner yerleştirme uygulamasının çekirdeği olmaya hazır — sabit kasa boyutu + çoklu konteyner sarmalayıcı + veri girişi arayüzü ile demo kurulabilir.</a:t>
+            </a:r>
+          </a:p>
+        </p:txBody>
+      </p:sp>
+    </p:spTree>
+  </p:cSld>
+  <p:clrMapOvr>
+    <a:masterClrMapping/>
+  </p:clrMapOvr>
+</p:sld>
+</file>
+
+<file path=ppt/slides/slide13.xml><?xml version="1.0" encoding="utf-8"?>
+<p:sld xmlns:a="http://schemas.openxmlformats.org/drawingml/2006/main" xmlns:p="http://schemas.openxmlformats.org/presentationml/2006/main" xmlns:r="http://schemas.openxmlformats.org/officeDocument/2006/relationships">
+  <p:cSld>
+    <p:bg>
+      <p:bgPr>
+        <a:solidFill>
+          <a:srgbClr val="F8FAFC"/>
+        </a:solidFill>
+        <a:effectLst/>
+      </p:bgPr>
+    </p:bg>
+    <p:spTree>
+      <p:nvGrpSpPr>
+        <p:cNvPr id="1" name=""/>
+        <p:cNvGrpSpPr/>
+        <p:nvPr/>
+      </p:nvGrpSpPr>
+      <p:grpSpPr/>
+      <p:sp>
+        <p:nvSpPr>
+          <p:cNvPr id="2" name="Rectangle 1"/>
+          <p:cNvSpPr/>
+          <p:nvPr/>
+        </p:nvSpPr>
+        <p:spPr>
+          <a:xfrm>
+            <a:off x="0" y="0"/>
+            <a:ext cx="12191695" cy="109728"/>
+          </a:xfrm>
+          <a:prstGeom prst="rect">
+            <a:avLst/>
+          </a:prstGeom>
+          <a:solidFill>
+            <a:srgbClr val="2563EB"/>
+          </a:solidFill>
+          <a:ln>
+            <a:noFill/>
+          </a:ln>
+        </p:spPr>
+        <p:style>
+          <a:lnRef idx="1">
+            <a:schemeClr val="accent1"/>
+          </a:lnRef>
+          <a:fillRef idx="3">
+            <a:schemeClr val="accent1"/>
+          </a:fillRef>
+          <a:effectRef idx="2">
+            <a:schemeClr val="accent1"/>
+          </a:effectRef>
+          <a:fontRef idx="minor">
+            <a:schemeClr val="lt1"/>
+          </a:fontRef>
+        </p:style>
+        <p:txBody>
+          <a:bodyPr rtlCol="0" anchor="ctr"/>
+          <a:lstStyle/>
+          <a:p>
+            <a:pPr algn="ctr"/>
+          </a:p>
+        </p:txBody>
+      </p:sp>
+      <p:sp>
+        <p:nvSpPr>
+          <p:cNvPr id="3" name="TextBox 2"/>
+          <p:cNvSpPr txBox="1"/>
+          <p:nvPr/>
+        </p:nvSpPr>
+        <p:spPr>
+          <a:xfrm>
+            <a:off x="640080" y="411480"/>
+            <a:ext cx="10972800" cy="914400"/>
+          </a:xfrm>
+          <a:prstGeom prst="rect">
+            <a:avLst/>
+          </a:prstGeom>
+          <a:noFill/>
+        </p:spPr>
+        <p:txBody>
+          <a:bodyPr wrap="square">
+            <a:spAutoFit/>
+          </a:bodyPr>
+          <a:lstStyle/>
+          <a:p>
+            <a:r>
+              <a:rPr sz="3200" b="1">
+                <a:solidFill>
+                  <a:srgbClr val="2563EB"/>
+                </a:solidFill>
+              </a:rPr>
+              <a:t>Özet</a:t>
+            </a:r>
+          </a:p>
+        </p:txBody>
+      </p:sp>
+      <p:sp>
+        <p:nvSpPr>
+          <p:cNvPr id="4" name="Rectangle 3"/>
+          <p:cNvSpPr/>
+          <p:nvPr/>
+        </p:nvSpPr>
+        <p:spPr>
+          <a:xfrm>
+            <a:off x="658368" y="1325880"/>
+            <a:ext cx="6858000" cy="38100"/>
+          </a:xfrm>
+          <a:prstGeom prst="rect">
+            <a:avLst/>
+          </a:prstGeom>
+          <a:solidFill>
+            <a:srgbClr val="2563EB"/>
+          </a:solidFill>
+          <a:ln>
+            <a:noFill/>
+          </a:ln>
+        </p:spPr>
+        <p:style>
+          <a:lnRef idx="1">
+            <a:schemeClr val="accent1"/>
+          </a:lnRef>
+          <a:fillRef idx="3">
+            <a:schemeClr val="accent1"/>
+          </a:fillRef>
+          <a:effectRef idx="2">
+            <a:schemeClr val="accent1"/>
+          </a:effectRef>
+          <a:fontRef idx="minor">
+            <a:schemeClr val="lt1"/>
+          </a:fontRef>
+        </p:style>
+        <p:txBody>
+          <a:bodyPr rtlCol="0" anchor="ctr"/>
+          <a:lstStyle/>
+          <a:p>
+            <a:pPr algn="ctr"/>
+          </a:p>
+        </p:txBody>
+      </p:sp>
+      <p:sp>
+        <p:nvSpPr>
+          <p:cNvPr id="5" name="TextBox 4"/>
+          <p:cNvSpPr txBox="1"/>
+          <p:nvPr/>
+        </p:nvSpPr>
+        <p:spPr>
+          <a:xfrm>
+            <a:off x="731520" y="1691640"/>
+            <a:ext cx="10698480" cy="4572000"/>
+          </a:xfrm>
+          <a:prstGeom prst="rect">
+            <a:avLst/>
+          </a:prstGeom>
+          <a:noFill/>
+        </p:spPr>
+        <p:txBody>
+          <a:bodyPr wrap="square">
+            <a:spAutoFit/>
+          </a:bodyPr>
+          <a:lstStyle/>
+          <a:p>
+            <a:pPr>
+              <a:spcAft>
+                <a:spcPts val="1200"/>
+              </a:spcAft>
+            </a:pPr>
+            <a:r>
+              <a:rPr sz="2000" b="0">
+                <a:solidFill>
+                  <a:srgbClr val="1E293B"/>
+                </a:solidFill>
+              </a:rPr>
+              <a:t>•  Makine şartlarıyla (335×335 mm, z ≤ 600 mm, boşluk &gt;= 1 mm (garantili)) 48 parçanın tamamı yerleşti.</a:t>
+            </a:r>
+          </a:p>
+          <a:p>
+            <a:pPr>
+              <a:spcAft>
+                <a:spcPts val="1200"/>
+              </a:spcAft>
+            </a:pPr>
+            <a:r>
+              <a:rPr sz="2000" b="1">
+                <a:solidFill>
+                  <a:srgbClr val="059659"/>
+                </a:solidFill>
+              </a:rPr>
+              <a:t>•  Z yüksekliği: DBLF 214.5 mm → SA 181.5 mm  (−33.0 mm  (%15.4)).</a:t>
+            </a:r>
+          </a:p>
+          <a:p>
+            <a:pPr>
+              <a:spcAft>
+                <a:spcPts val="1200"/>
+              </a:spcAft>
+            </a:pPr>
+            <a:r>
+              <a:rPr sz="2000" b="1">
+                <a:solidFill>
+                  <a:srgbClr val="059659"/>
+                </a:solidFill>
+              </a:rPr>
+              <a:t>•  Parça arası ölçülen min boşluk: 1.50 mm — iç içe geçme/çakışma YOK.</a:t>
+            </a:r>
+          </a:p>
+          <a:p>
+            <a:pPr>
+              <a:spcAft>
+                <a:spcPts val="1200"/>
+              </a:spcAft>
+            </a:pPr>
+            <a:r>
+              <a:rPr sz="2000" b="1">
+                <a:solidFill>
+                  <a:srgbClr val="059659"/>
+                </a:solidFill>
+              </a:rPr>
+              <a:t>•  Çözünürlük: 3.950.364 üçgenin tamamı çıktıda — kabartma yazılar korunuyor.</a:t>
+            </a:r>
+          </a:p>
+          <a:p>
+            <a:pPr>
+              <a:spcAft>
+                <a:spcPts val="1200"/>
+              </a:spcAft>
+            </a:pPr>
+            <a:r>
+              <a:rPr sz="2000" b="0">
+                <a:solidFill>
+                  <a:srgbClr val="1E293B"/>
+                </a:solidFill>
+              </a:rPr>
+              <a:t>•  Önceki 155 mm: farklı taban + boşluksuz + ölçülmüş ihlal → geçersiz kıyas; yeni şartların geçerli en iyisi 181.5 mm.</a:t>
+            </a:r>
+          </a:p>
+          <a:p>
+            <a:pPr>
+              <a:spcAft>
+                <a:spcPts val="1200"/>
+              </a:spcAft>
+            </a:pPr>
+            <a:r>
+              <a:rPr sz="2000" b="0">
+                <a:solidFill>
+                  <a:srgbClr val="1E293B"/>
+                </a:solidFill>
+              </a:rPr>
+              <a:t>•  Tekrar-üretilebilir: 95 test · sabit seed · parametrik CLI · STL hazır.</a:t>
             </a:r>
           </a:p>
         </p:txBody>
@@ -4654,7 +5733,7 @@
         </p:nvSpPr>
         <p:spPr>
           <a:xfrm>
-            <a:off x="731520" y="5120640"/>
+            <a:off x="731520" y="5486400"/>
             <a:ext cx="10698480" cy="914400"/>
           </a:xfrm>
           <a:prstGeom prst="rect">
@@ -4674,7 +5753,7 @@
                   <a:srgbClr val="64748B"/>
                 </a:solidFill>
               </a:rPr>
-              <a:t>Teşekkürler — 170 mm'nin koşullarını teyit edebilir miyiz?</a:t>
+              <a:t>Teşekkürler — makine tablası ve kural setinizde birebir doğrulama koşusu yapalım mı?</a:t>
             </a:r>
           </a:p>
         </p:txBody>
@@ -4776,7 +5855,7 @@
                   <a:srgbClr val="2563EB"/>
                 </a:solidFill>
               </a:rPr>
-              <a:t>Verilen Numuneler — 8 Model, 48 Parça</a:t>
+              <a:t>Geçen Haftaki Şartlar → Durum</a:t>
             </a:r>
           </a:p>
         </p:txBody>
@@ -4824,81 +5903,358 @@
           </a:p>
         </p:txBody>
       </p:sp>
-      <p:pic>
-        <p:nvPicPr>
-          <p:cNvPr id="5" name="Picture 4" descr="numune_overview.png"/>
-          <p:cNvPicPr>
-            <a:picLocks noChangeAspect="1"/>
-          </p:cNvPicPr>
+      <p:graphicFrame>
+        <p:nvGraphicFramePr>
+          <p:cNvPr id="5" name="Table 4"/>
+          <p:cNvGraphicFramePr>
+            <a:graphicFrameLocks noGrp="1"/>
+          </p:cNvGraphicFramePr>
           <p:nvPr/>
-        </p:nvPicPr>
-        <p:blipFill>
-          <a:blip r:embed="rId2"/>
-          <a:stretch>
-            <a:fillRect/>
-          </a:stretch>
-        </p:blipFill>
-        <p:spPr>
-          <a:xfrm>
-            <a:off x="2212695" y="1463040"/>
-            <a:ext cx="7766304" cy="4160520"/>
-          </a:xfrm>
-          <a:prstGeom prst="rect">
-            <a:avLst/>
-          </a:prstGeom>
-        </p:spPr>
-      </p:pic>
-      <p:sp>
-        <p:nvSpPr>
-          <p:cNvPr id="6" name="Rectangle 5"/>
-          <p:cNvSpPr/>
-          <p:nvPr/>
-        </p:nvSpPr>
-        <p:spPr>
-          <a:xfrm>
-            <a:off x="731520" y="5760720"/>
-            <a:ext cx="10698480" cy="914400"/>
-          </a:xfrm>
-          <a:prstGeom prst="rect">
-            <a:avLst/>
-          </a:prstGeom>
-          <a:solidFill>
-            <a:srgbClr val="FEF9C3"/>
-          </a:solidFill>
-          <a:ln>
-            <a:noFill/>
-          </a:ln>
-        </p:spPr>
-        <p:style>
-          <a:lnRef idx="1">
-            <a:schemeClr val="accent1"/>
-          </a:lnRef>
-          <a:fillRef idx="3">
-            <a:schemeClr val="accent1"/>
-          </a:fillRef>
-          <a:effectRef idx="2">
-            <a:schemeClr val="accent1"/>
-          </a:effectRef>
-          <a:fontRef idx="minor">
-            <a:schemeClr val="lt1"/>
-          </a:fontRef>
-        </p:style>
-        <p:txBody>
-          <a:bodyPr rtlCol="0" anchor="ctr" wrap="square" lIns="152400" tIns="101600"/>
-          <a:lstStyle/>
-          <a:p>
-            <a:pPr algn="ctr"/>
-            <a:r>
-              <a:rPr sz="1300" b="0">
-                <a:solidFill>
-                  <a:srgbClr val="1E293B"/>
-                </a:solidFill>
-              </a:rPr>
-              <a:t>Gerçek mm boyutları korunarak yüklendi (ölçekleme YOK). En kritik kısıt: 4.stl tam 304.8 mm (12") — 220 mm tabla hiçbir duruşta almıyor → taban 350×350 mm seçildi. Adetler: 1×4 · 2×16 · 3×3 · 4×15 · 5×1 · 6×3 · 7×3 · 8×3.</a:t>
-            </a:r>
-          </a:p>
-        </p:txBody>
-      </p:sp>
+        </p:nvGraphicFramePr>
+        <p:xfrm>
+          <a:off x="731520" y="1691640"/>
+          <a:ext cx="10698479" cy="3657600"/>
+        </p:xfrm>
+        <a:graphic>
+          <a:graphicData uri="http://schemas.openxmlformats.org/drawingml/2006/table">
+            <a:tbl>
+              <a:tblPr firstRow="1" bandRow="1">
+                <a:tableStyleId>{5C22544A-7EE6-4342-B048-85BDC9FD1C3A}</a:tableStyleId>
+              </a:tblPr>
+              <a:tblGrid>
+                <a:gridCol w="3749039"/>
+                <a:gridCol w="5486400"/>
+                <a:gridCol w="1463040"/>
+              </a:tblGrid>
+              <a:tr h="731520">
+                <a:tc>
+                  <a:txBody>
+                    <a:bodyPr/>
+                    <a:lstStyle/>
+                    <a:p>
+                      <a:r>
+                        <a:rPr sz="1500" b="1">
+                          <a:solidFill>
+                            <a:srgbClr val="FFFFFF"/>
+                          </a:solidFill>
+                        </a:rPr>
+                        <a:t>Şart (2026-06-11)</a:t>
+                      </a:r>
+                    </a:p>
+                  </a:txBody>
+                  <a:tcPr>
+                    <a:solidFill>
+                      <a:srgbClr val="2563EB"/>
+                    </a:solidFill>
+                  </a:tcPr>
+                </a:tc>
+                <a:tc>
+                  <a:txBody>
+                    <a:bodyPr/>
+                    <a:lstStyle/>
+                    <a:p>
+                      <a:r>
+                        <a:rPr sz="1500" b="1">
+                          <a:solidFill>
+                            <a:srgbClr val="FFFFFF"/>
+                          </a:solidFill>
+                        </a:rPr>
+                        <a:t>Uygulanan çözüm</a:t>
+                      </a:r>
+                    </a:p>
+                  </a:txBody>
+                  <a:tcPr>
+                    <a:solidFill>
+                      <a:srgbClr val="2563EB"/>
+                    </a:solidFill>
+                  </a:tcPr>
+                </a:tc>
+                <a:tc>
+                  <a:txBody>
+                    <a:bodyPr/>
+                    <a:lstStyle/>
+                    <a:p>
+                      <a:r>
+                        <a:rPr sz="1500" b="1">
+                          <a:solidFill>
+                            <a:srgbClr val="FFFFFF"/>
+                          </a:solidFill>
+                        </a:rPr>
+                        <a:t>Durum</a:t>
+                      </a:r>
+                    </a:p>
+                  </a:txBody>
+                  <a:tcPr>
+                    <a:solidFill>
+                      <a:srgbClr val="2563EB"/>
+                    </a:solidFill>
+                  </a:tcPr>
+                </a:tc>
+              </a:tr>
+              <a:tr h="731520">
+                <a:tc>
+                  <a:txBody>
+                    <a:bodyPr/>
+                    <a:lstStyle/>
+                    <a:p>
+                      <a:r>
+                        <a:rPr sz="1300" b="0">
+                          <a:solidFill>
+                            <a:srgbClr val="1E293B"/>
+                          </a:solidFill>
+                        </a:rPr>
+                        <a:t>Parça arası min 1 mm boşluk (her yönde)</a:t>
+                      </a:r>
+                    </a:p>
+                  </a:txBody>
+                  <a:tcPr>
+                    <a:solidFill>
+                      <a:srgbClr val="FFFFFF"/>
+                    </a:solidFill>
+                  </a:tcPr>
+                </a:tc>
+                <a:tc>
+                  <a:txBody>
+                    <a:bodyPr/>
+                    <a:lstStyle/>
+                    <a:p>
+                      <a:r>
+                        <a:rPr sz="1300" b="0">
+                          <a:solidFill>
+                            <a:srgbClr val="1E293B"/>
+                          </a:solidFill>
+                        </a:rPr>
+                        <a:t>Konservatif voxel sarması + yatay/dikey boşluk şeması; orijinal geometride ölçüm: min 1.50 mm</a:t>
+                      </a:r>
+                    </a:p>
+                  </a:txBody>
+                  <a:tcPr>
+                    <a:solidFill>
+                      <a:srgbClr val="FFFFFF"/>
+                    </a:solidFill>
+                  </a:tcPr>
+                </a:tc>
+                <a:tc>
+                  <a:txBody>
+                    <a:bodyPr/>
+                    <a:lstStyle/>
+                    <a:p>
+                      <a:r>
+                        <a:rPr sz="1300" b="1">
+                          <a:solidFill>
+                            <a:srgbClr val="166534"/>
+                          </a:solidFill>
+                        </a:rPr>
+                        <a:t>✓ ölçüldü</a:t>
+                      </a:r>
+                    </a:p>
+                  </a:txBody>
+                  <a:tcPr>
+                    <a:solidFill>
+                      <a:srgbClr val="FFFFFF"/>
+                    </a:solidFill>
+                  </a:tcPr>
+                </a:tc>
+              </a:tr>
+              <a:tr h="731520">
+                <a:tc>
+                  <a:txBody>
+                    <a:bodyPr/>
+                    <a:lstStyle/>
+                    <a:p>
+                      <a:r>
+                        <a:rPr sz="1300" b="0">
+                          <a:solidFill>
+                            <a:srgbClr val="1E293B"/>
+                          </a:solidFill>
+                        </a:rPr>
+                        <a:t>Makine: taban 335×335 mm, max z 600 mm</a:t>
+                      </a:r>
+                    </a:p>
+                  </a:txBody>
+                  <a:tcPr>
+                    <a:solidFill>
+                      <a:srgbClr val="FFFFFF"/>
+                    </a:solidFill>
+                  </a:tcPr>
+                </a:tc>
+                <a:tc>
+                  <a:txBody>
+                    <a:bodyPr/>
+                    <a:lstStyle/>
+                    <a:p>
+                      <a:r>
+                        <a:rPr sz="1300" b="0">
+                          <a:solidFill>
+                            <a:srgbClr val="1E293B"/>
+                          </a:solidFill>
+                        </a:rPr>
+                        <a:t>Taban 335×335 mm; sonuç 181.5 mm ≤ 600 mm</a:t>
+                      </a:r>
+                    </a:p>
+                  </a:txBody>
+                  <a:tcPr>
+                    <a:solidFill>
+                      <a:srgbClr val="FFFFFF"/>
+                    </a:solidFill>
+                  </a:tcPr>
+                </a:tc>
+                <a:tc>
+                  <a:txBody>
+                    <a:bodyPr/>
+                    <a:lstStyle/>
+                    <a:p>
+                      <a:r>
+                        <a:rPr sz="1300" b="1">
+                          <a:solidFill>
+                            <a:srgbClr val="166534"/>
+                          </a:solidFill>
+                        </a:rPr>
+                        <a:t>✓</a:t>
+                      </a:r>
+                    </a:p>
+                  </a:txBody>
+                  <a:tcPr>
+                    <a:solidFill>
+                      <a:srgbClr val="FFFFFF"/>
+                    </a:solidFill>
+                  </a:tcPr>
+                </a:tc>
+              </a:tr>
+              <a:tr h="731520">
+                <a:tc>
+                  <a:txBody>
+                    <a:bodyPr/>
+                    <a:lstStyle/>
+                    <a:p>
+                      <a:r>
+                        <a:rPr sz="1300" b="0">
+                          <a:solidFill>
+                            <a:srgbClr val="1E293B"/>
+                          </a:solidFill>
+                        </a:rPr>
+                        <a:t>Çözünürlük: kabartma yazılar kaybolmayacak</a:t>
+                      </a:r>
+                    </a:p>
+                  </a:txBody>
+                  <a:tcPr>
+                    <a:solidFill>
+                      <a:srgbClr val="FFFFFF"/>
+                    </a:solidFill>
+                  </a:tcPr>
+                </a:tc>
+                <a:tc>
+                  <a:txBody>
+                    <a:bodyPr/>
+                    <a:lstStyle/>
+                    <a:p>
+                      <a:r>
+                        <a:rPr sz="1300" b="0">
+                          <a:solidFill>
+                            <a:srgbClr val="1E293B"/>
+                          </a:solidFill>
+                        </a:rPr>
+                        <a:t>Devoxelization — çıktı STL orijinal mesh'lerden; 3.950.364 üçgenin tamamı birebir korunuyor</a:t>
+                      </a:r>
+                    </a:p>
+                  </a:txBody>
+                  <a:tcPr>
+                    <a:solidFill>
+                      <a:srgbClr val="FFFFFF"/>
+                    </a:solidFill>
+                  </a:tcPr>
+                </a:tc>
+                <a:tc>
+                  <a:txBody>
+                    <a:bodyPr/>
+                    <a:lstStyle/>
+                    <a:p>
+                      <a:r>
+                        <a:rPr sz="1300" b="1">
+                          <a:solidFill>
+                            <a:srgbClr val="166534"/>
+                          </a:solidFill>
+                        </a:rPr>
+                        <a:t>✓ doğrulandı</a:t>
+                      </a:r>
+                    </a:p>
+                  </a:txBody>
+                  <a:tcPr>
+                    <a:solidFill>
+                      <a:srgbClr val="FFFFFF"/>
+                    </a:solidFill>
+                  </a:tcPr>
+                </a:tc>
+              </a:tr>
+              <a:tr h="731520">
+                <a:tc>
+                  <a:txBody>
+                    <a:bodyPr/>
+                    <a:lstStyle/>
+                    <a:p>
+                      <a:r>
+                        <a:rPr sz="1300" b="0">
+                          <a:solidFill>
+                            <a:srgbClr val="1E293B"/>
+                          </a:solidFill>
+                        </a:rPr>
+                        <a:t>Optimizasyon voxel'de, çıktı orijinal parçalarla</a:t>
+                      </a:r>
+                    </a:p>
+                  </a:txBody>
+                  <a:tcPr>
+                    <a:solidFill>
+                      <a:srgbClr val="FFFFFF"/>
+                    </a:solidFill>
+                  </a:tcPr>
+                </a:tc>
+                <a:tc>
+                  <a:txBody>
+                    <a:bodyPr/>
+                    <a:lstStyle/>
+                    <a:p>
+                      <a:r>
+                        <a:rPr sz="1300" b="0">
+                          <a:solidFill>
+                            <a:srgbClr val="1E293B"/>
+                          </a:solidFill>
+                        </a:rPr>
+                        <a:t>Voxel yalnız yerleşim hesabında; STL sahnesi orijinal geometriyle kurulur</a:t>
+                      </a:r>
+                    </a:p>
+                  </a:txBody>
+                  <a:tcPr>
+                    <a:solidFill>
+                      <a:srgbClr val="FFFFFF"/>
+                    </a:solidFill>
+                  </a:tcPr>
+                </a:tc>
+                <a:tc>
+                  <a:txBody>
+                    <a:bodyPr/>
+                    <a:lstStyle/>
+                    <a:p>
+                      <a:r>
+                        <a:rPr sz="1300" b="1">
+                          <a:solidFill>
+                            <a:srgbClr val="166534"/>
+                          </a:solidFill>
+                        </a:rPr>
+                        <a:t>✓</a:t>
+                      </a:r>
+                    </a:p>
+                  </a:txBody>
+                  <a:tcPr>
+                    <a:solidFill>
+                      <a:srgbClr val="FFFFFF"/>
+                    </a:solidFill>
+                  </a:tcPr>
+                </a:tc>
+              </a:tr>
+            </a:tbl>
+          </a:graphicData>
+        </a:graphic>
+      </p:graphicFrame>
     </p:spTree>
   </p:cSld>
   <p:clrMapOvr>
@@ -4996,7 +6352,7 @@
                   <a:srgbClr val="2563EB"/>
                 </a:solidFill>
               </a:rPr>
-              <a:t>Kurulum — Aynı Pipeline, Gerçek Veri</a:t>
+              <a:t>Verilen Numuneler — 8 Model, 48 Parça</a:t>
             </a:r>
           </a:p>
         </p:txBody>
@@ -5044,89 +6400,30 @@
           </a:p>
         </p:txBody>
       </p:sp>
-      <p:sp>
-        <p:nvSpPr>
-          <p:cNvPr id="5" name="TextBox 4"/>
-          <p:cNvSpPr txBox="1"/>
+      <p:pic>
+        <p:nvPicPr>
+          <p:cNvPr id="5" name="Picture 4" descr="numune_overview.png"/>
+          <p:cNvPicPr>
+            <a:picLocks noChangeAspect="1"/>
+          </p:cNvPicPr>
           <p:nvPr/>
-        </p:nvSpPr>
+        </p:nvPicPr>
+        <p:blipFill>
+          <a:blip r:embed="rId2"/>
+          <a:stretch>
+            <a:fillRect/>
+          </a:stretch>
+        </p:blipFill>
         <p:spPr>
           <a:xfrm>
-            <a:off x="731520" y="1691640"/>
-            <a:ext cx="10698480" cy="4572000"/>
+            <a:off x="2212695" y="1463040"/>
+            <a:ext cx="7766304" cy="4160520"/>
           </a:xfrm>
           <a:prstGeom prst="rect">
             <a:avLst/>
           </a:prstGeom>
-          <a:noFill/>
         </p:spPr>
-        <p:txBody>
-          <a:bodyPr wrap="square">
-            <a:spAutoFit/>
-          </a:bodyPr>
-          <a:lstStyle/>
-          <a:p>
-            <a:pPr>
-              <a:spcAft>
-                <a:spcPts val="1200"/>
-              </a:spcAft>
-            </a:pPr>
-            <a:r>
-              <a:rPr sz="2000" b="0">
-                <a:solidFill>
-                  <a:srgbClr val="1E293B"/>
-                </a:solidFill>
-              </a:rPr>
-              <a:t>•  Taban 350×350 mm (140×140 hücre grid), voxel boyutu 2.5 mm, 4 eksen-hizalı duruş/parça, parça arası ek boşluk 0.</a:t>
-            </a:r>
-          </a:p>
-          <a:p>
-            <a:pPr>
-              <a:spcAft>
-                <a:spcPts val="1200"/>
-              </a:spcAft>
-            </a:pPr>
-            <a:r>
-              <a:rPr sz="2000" b="1">
-                <a:solidFill>
-                  <a:srgbClr val="059659"/>
-                </a:solidFill>
-              </a:rPr>
-              <a:t>•  Yeni: slice voxelization — yüksek üçgen sayılı gerçek STL'lerde (235 bine kadar üçgen) eski yöntem parça başına ~30 sn sürüyor ve ince plakaları ~2.5 kat şişiriyordu; yenisi 0.2 sn ve hacim-doğru.</a:t>
-            </a:r>
-          </a:p>
-          <a:p>
-            <a:pPr>
-              <a:spcAft>
-                <a:spcPts val="1200"/>
-              </a:spcAft>
-            </a:pPr>
-            <a:r>
-              <a:rPr sz="2000" b="0">
-                <a:solidFill>
-                  <a:srgbClr val="1E293B"/>
-                </a:solidFill>
-              </a:rPr>
-              <a:t>•  Aşama 2'deki algoritmalar DEĞİŞMEDİ: DBLF baseline + SA katmanı aynen kullanıldı — pipeline'ın model-bağımsızlığının testi.</a:t>
-            </a:r>
-          </a:p>
-          <a:p>
-            <a:pPr>
-              <a:spcAft>
-                <a:spcPts val="1200"/>
-              </a:spcAft>
-            </a:pPr>
-            <a:r>
-              <a:rPr sz="2000" b="0">
-                <a:solidFill>
-                  <a:srgbClr val="1E293B"/>
-                </a:solidFill>
-              </a:rPr>
-              <a:t>•  Doğrulama: 77 birim testi (72 eski + 5 yeni numune testi) geçiyor; seed=42, tekrar-üretilebilir.</a:t>
-            </a:r>
-          </a:p>
-        </p:txBody>
-      </p:sp>
+      </p:pic>
       <p:sp>
         <p:nvSpPr>
           <p:cNvPr id="6" name="Rectangle 5"/>
@@ -5135,8 +6432,8 @@
         </p:nvSpPr>
         <p:spPr>
           <a:xfrm>
-            <a:off x="731520" y="5212080"/>
-            <a:ext cx="10698480" cy="1005840"/>
+            <a:off x="731520" y="5760720"/>
+            <a:ext cx="10698480" cy="914400"/>
           </a:xfrm>
           <a:prstGeom prst="rect">
             <a:avLst/>
@@ -5168,12 +6465,12 @@
           <a:p>
             <a:pPr algn="ctr"/>
             <a:r>
-              <a:rPr sz="1600" b="0">
+              <a:rPr sz="1300" b="0">
                 <a:solidFill>
                   <a:srgbClr val="1E293B"/>
                 </a:solidFill>
               </a:rPr>
-              <a:t>Voxel çözünürlüğü 2.5 mm → raporlanan yükseklikler 2.5 mm'lik katmanlara YUKARI yuvarlanmış muhafazakâr değerlerdir (gerçek geometrik tepe bir miktar altında).</a:t>
+              <a:t>Gerçek mm boyutları korunarak yüklendi (ölçekleme YOK). Taban artık makinenizin ölçüsü: 335×335 mm. Kritik geometri: 12 büyük delikli plaka (3/6/7/8 ×3) — taban aynı anda tek plaka alıyor, istif stratejisi sonucu belirliyor. Adetler: 1×4 · 2×16 · 3×3 · 4×15 · 5×1 · 6×3 · 7×3 · 8×3.</a:t>
             </a:r>
           </a:p>
         </p:txBody>
@@ -5275,7 +6572,7 @@
                   <a:srgbClr val="2563EB"/>
                 </a:solidFill>
               </a:rPr>
-              <a:t>Yerleşim 1 — DBLF Baseline</a:t>
+              <a:t>Kurulum — Makine Şartlarıyla Final Konfigürasyon</a:t>
             </a:r>
           </a:p>
         </p:txBody>
@@ -5323,40 +6620,16 @@
           </a:p>
         </p:txBody>
       </p:sp>
-      <p:pic>
-        <p:nvPicPr>
-          <p:cNvPr id="5" name="Picture 4" descr="nesting3d_numune.png"/>
-          <p:cNvPicPr>
-            <a:picLocks noChangeAspect="1"/>
-          </p:cNvPicPr>
+      <p:sp>
+        <p:nvSpPr>
+          <p:cNvPr id="5" name="TextBox 4"/>
+          <p:cNvSpPr txBox="1"/>
           <p:nvPr/>
-        </p:nvPicPr>
-        <p:blipFill>
-          <a:blip r:embed="rId2"/>
-          <a:stretch>
-            <a:fillRect/>
-          </a:stretch>
-        </p:blipFill>
+        </p:nvSpPr>
         <p:spPr>
           <a:xfrm>
-            <a:off x="411480" y="1508760"/>
-            <a:ext cx="6858000" cy="5334000"/>
-          </a:xfrm>
-          <a:prstGeom prst="rect">
-            <a:avLst/>
-          </a:prstGeom>
-        </p:spPr>
-      </p:pic>
-      <p:sp>
-        <p:nvSpPr>
-          <p:cNvPr id="6" name="TextBox 5"/>
-          <p:cNvSpPr txBox="1"/>
-          <p:nvPr/>
-        </p:nvSpPr>
-        <p:spPr>
-          <a:xfrm>
-            <a:off x="731520" y="6309360"/>
-            <a:ext cx="5943600" cy="457200"/>
+            <a:off x="731520" y="1691640"/>
+            <a:ext cx="10698480" cy="4572000"/>
           </a:xfrm>
           <a:prstGeom prst="rect">
             <a:avLst/>
@@ -5364,39 +6637,6 @@
           <a:noFill/>
         </p:spPr>
         <p:txBody>
-          <a:bodyPr wrap="none">
-            <a:spAutoFit/>
-          </a:bodyPr>
-          <a:lstStyle/>
-          <a:p>
-            <a:r>
-              <a:rPr sz="1200">
-                <a:solidFill>
-                  <a:srgbClr val="64748B"/>
-                </a:solidFill>
-              </a:rPr>
-              <a:t>48 parçanın tamamı yerleşti — greedy kural, hacim-azalan sıra</a:t>
-            </a:r>
-          </a:p>
-        </p:txBody>
-      </p:sp>
-      <p:sp>
-        <p:nvSpPr>
-          <p:cNvPr id="7" name="TextBox 6"/>
-          <p:cNvSpPr txBox="1"/>
-          <p:nvPr/>
-        </p:nvSpPr>
-        <p:spPr>
-          <a:xfrm>
-            <a:off x="7498079" y="1737360"/>
-            <a:ext cx="4206240" cy="3840480"/>
-          </a:xfrm>
-          <a:prstGeom prst="rect">
-            <a:avLst/>
-          </a:prstGeom>
-          <a:noFill/>
-        </p:spPr>
-        <p:txBody>
           <a:bodyPr wrap="square">
             <a:spAutoFit/>
           </a:bodyPr>
@@ -5404,105 +6644,90 @@
           <a:p>
             <a:pPr>
               <a:spcAft>
-                <a:spcPts val="200"/>
+                <a:spcPts val="1200"/>
               </a:spcAft>
             </a:pPr>
             <a:r>
-              <a:rPr sz="1500">
-                <a:solidFill>
-                  <a:srgbClr val="64748B"/>
+              <a:rPr sz="2000" b="0">
+                <a:solidFill>
+                  <a:srgbClr val="1E293B"/>
                 </a:solidFill>
               </a:rPr>
-              <a:t>Z yüksekliği</a:t>
+              <a:t>•  Taban 335×335 mm, voxel 1.5 mm, z limiti 600 mm — makinenizin ölçüleri.</a:t>
             </a:r>
           </a:p>
           <a:p>
             <a:pPr>
               <a:spcAft>
-                <a:spcPts val="1400"/>
+                <a:spcPts val="1200"/>
               </a:spcAft>
             </a:pPr>
             <a:r>
-              <a:rPr sz="3400" b="1">
-                <a:solidFill>
-                  <a:srgbClr val="1E293B"/>
+              <a:rPr sz="2000" b="1">
+                <a:solidFill>
+                  <a:srgbClr val="059659"/>
                 </a:solidFill>
               </a:rPr>
-              <a:t>180.0 mm</a:t>
+              <a:t>•  Boşluk garantisi: konservatif voxelization (yüzey örnekleme — ince duvar/detay kaçmaz) + 1 voxel yatay genişletme + dikey istif boşluğu. Ardından bağımsız ölçüm: orijinal mesh'lerde en yakın çift araması.</a:t>
             </a:r>
           </a:p>
           <a:p>
             <a:pPr>
               <a:spcAft>
-                <a:spcPts val="200"/>
+                <a:spcPts val="1200"/>
               </a:spcAft>
             </a:pPr>
             <a:r>
-              <a:rPr sz="1500">
-                <a:solidFill>
-                  <a:srgbClr val="64748B"/>
+              <a:rPr sz="2000" b="0">
+                <a:solidFill>
+                  <a:srgbClr val="1E293B"/>
                 </a:solidFill>
               </a:rPr>
-              <a:t>Packing density</a:t>
+              <a:t>•  Poz stratejisi (hibrit): kısa plakalar (3, 6) dik durabilir; uzun plakalar (7, 8) yalnız yatık — dik boyları 187.5/190.1 mm tavan yaratıyordu. Bu seçim algoritmaya değil, parça analizine dayanıyor.</a:t>
             </a:r>
           </a:p>
           <a:p>
             <a:pPr>
               <a:spcAft>
-                <a:spcPts val="1400"/>
+                <a:spcPts val="1200"/>
               </a:spcAft>
             </a:pPr>
             <a:r>
-              <a:rPr sz="3400" b="1">
+              <a:rPr sz="2000" b="0">
                 <a:solidFill>
                   <a:srgbClr val="1E293B"/>
                 </a:solidFill>
               </a:rPr>
-              <a:t>0.102</a:t>
+              <a:t>•  Arama: DBLF baseline + SA (sıra + duruş, 2000 iterasyon) — best-so-far korunur, baseline'ın altına düşmez.</a:t>
             </a:r>
           </a:p>
           <a:p>
             <a:pPr>
               <a:spcAft>
-                <a:spcPts val="200"/>
+                <a:spcPts val="1200"/>
               </a:spcAft>
             </a:pPr>
             <a:r>
-              <a:rPr sz="1500">
-                <a:solidFill>
-                  <a:srgbClr val="64748B"/>
+              <a:rPr sz="2000" b="0">
+                <a:solidFill>
+                  <a:srgbClr val="1E293B"/>
                 </a:solidFill>
               </a:rPr>
-              <a:t>Süre</a:t>
-            </a:r>
-          </a:p>
-          <a:p>
-            <a:pPr>
-              <a:spcAft>
-                <a:spcPts val="1400"/>
-              </a:spcAft>
-            </a:pPr>
-            <a:r>
-              <a:rPr sz="2400" b="1">
-                <a:solidFill>
-                  <a:srgbClr val="64748B"/>
-                </a:solidFill>
-              </a:rPr>
-              <a:t>1.3 s</a:t>
-            </a:r>
-          </a:p>
-        </p:txBody>
-      </p:sp>
-      <p:sp>
-        <p:nvSpPr>
-          <p:cNvPr id="8" name="Rectangle 7"/>
+              <a:t>•  Doğrulama: 95 birim testi yeşil; seed sabit, tekrar-üretilebilir.</a:t>
+            </a:r>
+          </a:p>
+        </p:txBody>
+      </p:sp>
+      <p:sp>
+        <p:nvSpPr>
+          <p:cNvPr id="6" name="Rectangle 5"/>
           <p:cNvSpPr/>
           <p:nvPr/>
         </p:nvSpPr>
         <p:spPr>
           <a:xfrm>
-            <a:off x="7498079" y="4572000"/>
-            <a:ext cx="4206240" cy="1554480"/>
+            <a:off x="731520" y="5440680"/>
+            <a:ext cx="10698480" cy="914400"/>
           </a:xfrm>
           <a:prstGeom prst="rect">
             <a:avLst/>
@@ -5534,12 +6759,12 @@
           <a:p>
             <a:pPr algn="ctr"/>
             <a:r>
-              <a:rPr sz="1400" b="0">
+              <a:rPr sz="1600" b="0">
                 <a:solidFill>
                   <a:srgbClr val="1E293B"/>
                 </a:solidFill>
               </a:rPr>
-              <a:t>Büyük plakalar (3/6/7/8) tabanı kaplıyor, küçük parçalar aralara doluyor — ama greedy, plaka istifleme SIRASINI optimize edemiyor.</a:t>
+              <a:t>Raporlanan yükseklikler 1.5 mm katmanlara YUKARI yuvarlanmış muhafazakâr değerlerdir. Boşluk rakamı ise voxel değil, gerçek geometri ölçümüdür.</a:t>
             </a:r>
           </a:p>
         </p:txBody>
@@ -5641,7 +6866,7 @@
                   <a:srgbClr val="2563EB"/>
                 </a:solidFill>
               </a:rPr>
-              <a:t>Yerleşim 2 — Simulated Annealing</a:t>
+              <a:t>Yerleşim 1 — DBLF Baseline</a:t>
             </a:r>
           </a:p>
         </p:txBody>
@@ -5741,7 +6966,7 @@
                   <a:srgbClr val="64748B"/>
                 </a:solidFill>
               </a:rPr>
-              <a:t>Aynı 48 parça — SA'nın bulduğu sıra + duruş kombinasyonu</a:t>
+              <a:t>48 parçanın tamamı yerleşti — greedy kural, hacim-azalan sıra</a:t>
             </a:r>
           </a:p>
         </p:txBody>
@@ -5791,10 +7016,10 @@
             <a:r>
               <a:rPr sz="3400" b="1">
                 <a:solidFill>
-                  <a:srgbClr val="166534"/>
+                  <a:srgbClr val="1E293B"/>
                 </a:solidFill>
               </a:rPr>
-              <a:t>155.0 mm</a:t>
+              <a:t>214.5 mm</a:t>
             </a:r>
           </a:p>
           <a:p>
@@ -5821,10 +7046,10 @@
             <a:r>
               <a:rPr sz="3400" b="1">
                 <a:solidFill>
-                  <a:srgbClr val="166534"/>
+                  <a:srgbClr val="1E293B"/>
                 </a:solidFill>
               </a:rPr>
-              <a:t>0.118</a:t>
+              <a:t>0.189</a:t>
             </a:r>
           </a:p>
           <a:p>
@@ -5839,7 +7064,7 @@
                   <a:srgbClr val="64748B"/>
                 </a:solidFill>
               </a:rPr>
-              <a:t>Kazanç (DBLF'e göre)</a:t>
+              <a:t>Süre</a:t>
             </a:r>
           </a:p>
           <a:p>
@@ -5851,40 +7076,61 @@
             <a:r>
               <a:rPr sz="2400" b="1">
                 <a:solidFill>
-                  <a:srgbClr val="059659"/>
+                  <a:srgbClr val="64748B"/>
                 </a:solidFill>
               </a:rPr>
-              <a:t>−25.0 mm  (%13.9)</a:t>
-            </a:r>
-          </a:p>
-          <a:p>
-            <a:pPr>
-              <a:spcAft>
-                <a:spcPts val="200"/>
-              </a:spcAft>
-            </a:pPr>
-            <a:r>
-              <a:rPr sz="1500">
-                <a:solidFill>
-                  <a:srgbClr val="64748B"/>
+              <a:t>~11 s</a:t>
+            </a:r>
+          </a:p>
+        </p:txBody>
+      </p:sp>
+      <p:sp>
+        <p:nvSpPr>
+          <p:cNvPr id="8" name="Rectangle 7"/>
+          <p:cNvSpPr/>
+          <p:nvPr/>
+        </p:nvSpPr>
+        <p:spPr>
+          <a:xfrm>
+            <a:off x="7498079" y="4572000"/>
+            <a:ext cx="4206240" cy="1554480"/>
+          </a:xfrm>
+          <a:prstGeom prst="rect">
+            <a:avLst/>
+          </a:prstGeom>
+          <a:solidFill>
+            <a:srgbClr val="FEF9C3"/>
+          </a:solidFill>
+          <a:ln>
+            <a:noFill/>
+          </a:ln>
+        </p:spPr>
+        <p:style>
+          <a:lnRef idx="1">
+            <a:schemeClr val="accent1"/>
+          </a:lnRef>
+          <a:fillRef idx="3">
+            <a:schemeClr val="accent1"/>
+          </a:fillRef>
+          <a:effectRef idx="2">
+            <a:schemeClr val="accent1"/>
+          </a:effectRef>
+          <a:fontRef idx="minor">
+            <a:schemeClr val="lt1"/>
+          </a:fontRef>
+        </p:style>
+        <p:txBody>
+          <a:bodyPr rtlCol="0" anchor="ctr" wrap="square" lIns="152400" tIns="101600"/>
+          <a:lstStyle/>
+          <a:p>
+            <a:pPr algn="ctr"/>
+            <a:r>
+              <a:rPr sz="1400" b="0">
+                <a:solidFill>
+                  <a:srgbClr val="1E293B"/>
                 </a:solidFill>
               </a:rPr>
-              <a:t>Süre</a:t>
-            </a:r>
-          </a:p>
-          <a:p>
-            <a:pPr>
-              <a:spcAft>
-                <a:spcPts val="1400"/>
-              </a:spcAft>
-            </a:pPr>
-            <a:r>
-              <a:rPr sz="2400" b="1">
-                <a:solidFill>
-                  <a:srgbClr val="64748B"/>
-                </a:solidFill>
-              </a:rPr>
-              <a:t>506 s (1000 iterasyon)</a:t>
+              <a:t>Greedy tüm plakaları yatık istifliyor (anlık en alçak tepe hep yatık poz); istif sırasını ve dik-plaka fırsatını göremiyor.</a:t>
             </a:r>
           </a:p>
         </p:txBody>
@@ -5986,6 +7232,381 @@
                   <a:srgbClr val="2563EB"/>
                 </a:solidFill>
               </a:rPr>
+              <a:t>Yerleşim 2 — Simulated Annealing (Final)</a:t>
+            </a:r>
+          </a:p>
+        </p:txBody>
+      </p:sp>
+      <p:sp>
+        <p:nvSpPr>
+          <p:cNvPr id="4" name="Rectangle 3"/>
+          <p:cNvSpPr/>
+          <p:nvPr/>
+        </p:nvSpPr>
+        <p:spPr>
+          <a:xfrm>
+            <a:off x="658368" y="1325880"/>
+            <a:ext cx="6858000" cy="38100"/>
+          </a:xfrm>
+          <a:prstGeom prst="rect">
+            <a:avLst/>
+          </a:prstGeom>
+          <a:solidFill>
+            <a:srgbClr val="2563EB"/>
+          </a:solidFill>
+          <a:ln>
+            <a:noFill/>
+          </a:ln>
+        </p:spPr>
+        <p:style>
+          <a:lnRef idx="1">
+            <a:schemeClr val="accent1"/>
+          </a:lnRef>
+          <a:fillRef idx="3">
+            <a:schemeClr val="accent1"/>
+          </a:fillRef>
+          <a:effectRef idx="2">
+            <a:schemeClr val="accent1"/>
+          </a:effectRef>
+          <a:fontRef idx="minor">
+            <a:schemeClr val="lt1"/>
+          </a:fontRef>
+        </p:style>
+        <p:txBody>
+          <a:bodyPr rtlCol="0" anchor="ctr"/>
+          <a:lstStyle/>
+          <a:p>
+            <a:pPr algn="ctr"/>
+          </a:p>
+        </p:txBody>
+      </p:sp>
+      <p:pic>
+        <p:nvPicPr>
+          <p:cNvPr id="5" name="Picture 4" descr="nesting3d_numune.png"/>
+          <p:cNvPicPr>
+            <a:picLocks noChangeAspect="1"/>
+          </p:cNvPicPr>
+          <p:nvPr/>
+        </p:nvPicPr>
+        <p:blipFill>
+          <a:blip r:embed="rId2"/>
+          <a:stretch>
+            <a:fillRect/>
+          </a:stretch>
+        </p:blipFill>
+        <p:spPr>
+          <a:xfrm>
+            <a:off x="411480" y="1508760"/>
+            <a:ext cx="6858000" cy="5334000"/>
+          </a:xfrm>
+          <a:prstGeom prst="rect">
+            <a:avLst/>
+          </a:prstGeom>
+        </p:spPr>
+      </p:pic>
+      <p:sp>
+        <p:nvSpPr>
+          <p:cNvPr id="6" name="TextBox 5"/>
+          <p:cNvSpPr txBox="1"/>
+          <p:nvPr/>
+        </p:nvSpPr>
+        <p:spPr>
+          <a:xfrm>
+            <a:off x="731520" y="6309360"/>
+            <a:ext cx="5943600" cy="457200"/>
+          </a:xfrm>
+          <a:prstGeom prst="rect">
+            <a:avLst/>
+          </a:prstGeom>
+          <a:noFill/>
+        </p:spPr>
+        <p:txBody>
+          <a:bodyPr wrap="none">
+            <a:spAutoFit/>
+          </a:bodyPr>
+          <a:lstStyle/>
+          <a:p>
+            <a:r>
+              <a:rPr sz="1200">
+                <a:solidFill>
+                  <a:srgbClr val="64748B"/>
+                </a:solidFill>
+              </a:rPr>
+              <a:t>Kısa plakalar kenarda dik, uzun plakalar ortada yatık istif</a:t>
+            </a:r>
+          </a:p>
+        </p:txBody>
+      </p:sp>
+      <p:sp>
+        <p:nvSpPr>
+          <p:cNvPr id="7" name="TextBox 6"/>
+          <p:cNvSpPr txBox="1"/>
+          <p:nvPr/>
+        </p:nvSpPr>
+        <p:spPr>
+          <a:xfrm>
+            <a:off x="7498079" y="1737360"/>
+            <a:ext cx="4206240" cy="3840480"/>
+          </a:xfrm>
+          <a:prstGeom prst="rect">
+            <a:avLst/>
+          </a:prstGeom>
+          <a:noFill/>
+        </p:spPr>
+        <p:txBody>
+          <a:bodyPr wrap="square">
+            <a:spAutoFit/>
+          </a:bodyPr>
+          <a:lstStyle/>
+          <a:p>
+            <a:pPr>
+              <a:spcAft>
+                <a:spcPts val="200"/>
+              </a:spcAft>
+            </a:pPr>
+            <a:r>
+              <a:rPr sz="1500">
+                <a:solidFill>
+                  <a:srgbClr val="64748B"/>
+                </a:solidFill>
+              </a:rPr>
+              <a:t>Z yüksekliği</a:t>
+            </a:r>
+          </a:p>
+          <a:p>
+            <a:pPr>
+              <a:spcAft>
+                <a:spcPts val="1400"/>
+              </a:spcAft>
+            </a:pPr>
+            <a:r>
+              <a:rPr sz="3400" b="1">
+                <a:solidFill>
+                  <a:srgbClr val="166534"/>
+                </a:solidFill>
+              </a:rPr>
+              <a:t>181.5 mm</a:t>
+            </a:r>
+          </a:p>
+          <a:p>
+            <a:pPr>
+              <a:spcAft>
+                <a:spcPts val="200"/>
+              </a:spcAft>
+            </a:pPr>
+            <a:r>
+              <a:rPr sz="1500">
+                <a:solidFill>
+                  <a:srgbClr val="64748B"/>
+                </a:solidFill>
+              </a:rPr>
+              <a:t>Packing density</a:t>
+            </a:r>
+          </a:p>
+          <a:p>
+            <a:pPr>
+              <a:spcAft>
+                <a:spcPts val="1400"/>
+              </a:spcAft>
+            </a:pPr>
+            <a:r>
+              <a:rPr sz="3400" b="1">
+                <a:solidFill>
+                  <a:srgbClr val="166534"/>
+                </a:solidFill>
+              </a:rPr>
+              <a:t>0.229</a:t>
+            </a:r>
+          </a:p>
+          <a:p>
+            <a:pPr>
+              <a:spcAft>
+                <a:spcPts val="200"/>
+              </a:spcAft>
+            </a:pPr>
+            <a:r>
+              <a:rPr sz="1500">
+                <a:solidFill>
+                  <a:srgbClr val="64748B"/>
+                </a:solidFill>
+              </a:rPr>
+              <a:t>Kazanç (DBLF'e göre)</a:t>
+            </a:r>
+          </a:p>
+          <a:p>
+            <a:pPr>
+              <a:spcAft>
+                <a:spcPts val="1400"/>
+              </a:spcAft>
+            </a:pPr>
+            <a:r>
+              <a:rPr sz="2400" b="1">
+                <a:solidFill>
+                  <a:srgbClr val="059659"/>
+                </a:solidFill>
+              </a:rPr>
+              <a:t>−33.0 mm  (%15.4)</a:t>
+            </a:r>
+          </a:p>
+          <a:p>
+            <a:pPr>
+              <a:spcAft>
+                <a:spcPts val="200"/>
+              </a:spcAft>
+            </a:pPr>
+            <a:r>
+              <a:rPr sz="1500">
+                <a:solidFill>
+                  <a:srgbClr val="64748B"/>
+                </a:solidFill>
+              </a:rPr>
+              <a:t>Min boşluk (ölçülen)</a:t>
+            </a:r>
+          </a:p>
+          <a:p>
+            <a:pPr>
+              <a:spcAft>
+                <a:spcPts val="1400"/>
+              </a:spcAft>
+            </a:pPr>
+            <a:r>
+              <a:rPr sz="2400" b="1">
+                <a:solidFill>
+                  <a:srgbClr val="059659"/>
+                </a:solidFill>
+              </a:rPr>
+              <a:t>1.50 mm ✓</a:t>
+            </a:r>
+          </a:p>
+          <a:p>
+            <a:pPr>
+              <a:spcAft>
+                <a:spcPts val="200"/>
+              </a:spcAft>
+            </a:pPr>
+            <a:r>
+              <a:rPr sz="1500">
+                <a:solidFill>
+                  <a:srgbClr val="64748B"/>
+                </a:solidFill>
+              </a:rPr>
+              <a:t>Süre</a:t>
+            </a:r>
+          </a:p>
+          <a:p>
+            <a:pPr>
+              <a:spcAft>
+                <a:spcPts val="1400"/>
+              </a:spcAft>
+            </a:pPr>
+            <a:r>
+              <a:rPr sz="2400" b="1">
+                <a:solidFill>
+                  <a:srgbClr val="64748B"/>
+                </a:solidFill>
+              </a:rPr>
+              <a:t>~93 dk (2000 iterasyon, seed 13)</a:t>
+            </a:r>
+          </a:p>
+        </p:txBody>
+      </p:sp>
+    </p:spTree>
+  </p:cSld>
+  <p:clrMapOvr>
+    <a:masterClrMapping/>
+  </p:clrMapOvr>
+</p:sld>
+</file>
+
+<file path=ppt/slides/slide7.xml><?xml version="1.0" encoding="utf-8"?>
+<p:sld xmlns:a="http://schemas.openxmlformats.org/drawingml/2006/main" xmlns:p="http://schemas.openxmlformats.org/presentationml/2006/main" xmlns:r="http://schemas.openxmlformats.org/officeDocument/2006/relationships">
+  <p:cSld>
+    <p:bg>
+      <p:bgPr>
+        <a:solidFill>
+          <a:srgbClr val="F8FAFC"/>
+        </a:solidFill>
+        <a:effectLst/>
+      </p:bgPr>
+    </p:bg>
+    <p:spTree>
+      <p:nvGrpSpPr>
+        <p:cNvPr id="1" name=""/>
+        <p:cNvGrpSpPr/>
+        <p:nvPr/>
+      </p:nvGrpSpPr>
+      <p:grpSpPr/>
+      <p:sp>
+        <p:nvSpPr>
+          <p:cNvPr id="2" name="Rectangle 1"/>
+          <p:cNvSpPr/>
+          <p:nvPr/>
+        </p:nvSpPr>
+        <p:spPr>
+          <a:xfrm>
+            <a:off x="0" y="0"/>
+            <a:ext cx="12191695" cy="109728"/>
+          </a:xfrm>
+          <a:prstGeom prst="rect">
+            <a:avLst/>
+          </a:prstGeom>
+          <a:solidFill>
+            <a:srgbClr val="2563EB"/>
+          </a:solidFill>
+          <a:ln>
+            <a:noFill/>
+          </a:ln>
+        </p:spPr>
+        <p:style>
+          <a:lnRef idx="1">
+            <a:schemeClr val="accent1"/>
+          </a:lnRef>
+          <a:fillRef idx="3">
+            <a:schemeClr val="accent1"/>
+          </a:fillRef>
+          <a:effectRef idx="2">
+            <a:schemeClr val="accent1"/>
+          </a:effectRef>
+          <a:fontRef idx="minor">
+            <a:schemeClr val="lt1"/>
+          </a:fontRef>
+        </p:style>
+        <p:txBody>
+          <a:bodyPr rtlCol="0" anchor="ctr"/>
+          <a:lstStyle/>
+          <a:p>
+            <a:pPr algn="ctr"/>
+          </a:p>
+        </p:txBody>
+      </p:sp>
+      <p:sp>
+        <p:nvSpPr>
+          <p:cNvPr id="3" name="TextBox 2"/>
+          <p:cNvSpPr txBox="1"/>
+          <p:nvPr/>
+        </p:nvSpPr>
+        <p:spPr>
+          <a:xfrm>
+            <a:off x="640080" y="411480"/>
+            <a:ext cx="10972800" cy="914400"/>
+          </a:xfrm>
+          <a:prstGeom prst="rect">
+            <a:avLst/>
+          </a:prstGeom>
+          <a:noFill/>
+        </p:spPr>
+        <p:txBody>
+          <a:bodyPr wrap="square">
+            <a:spAutoFit/>
+          </a:bodyPr>
+          <a:lstStyle/>
+          <a:p>
+            <a:r>
+              <a:rPr sz="3200" b="1">
+                <a:solidFill>
+                  <a:srgbClr val="2563EB"/>
+                </a:solidFill>
+              </a:rPr>
               <a:t>Karşılaştırma — Rakamlar</a:t>
             </a:r>
           </a:p>
@@ -6053,11 +7674,11 @@
                 <a:tableStyleId>{5C22544A-7EE6-4342-B048-85BDC9FD1C3A}</a:tableStyleId>
               </a:tblPr>
               <a:tblGrid>
-                <a:gridCol w="2377440"/>
-                <a:gridCol w="2011680"/>
-                <a:gridCol w="1554480"/>
+                <a:gridCol w="2651760"/>
+                <a:gridCol w="1828800"/>
                 <a:gridCol w="1371600"/>
-                <a:gridCol w="3383280"/>
+                <a:gridCol w="1645920"/>
+                <a:gridCol w="3200400"/>
               </a:tblGrid>
               <a:tr h="571500">
                 <a:tc>
@@ -6138,7 +7759,7 @@
                             <a:srgbClr val="FFFFFF"/>
                           </a:solidFill>
                         </a:rPr>
-                        <a:t>Süre</a:t>
+                        <a:t>Min boşluk</a:t>
                       </a:r>
                     </a:p>
                   </a:txBody>
@@ -6179,7 +7800,7 @@
                     <a:p>
                       <a:pPr algn="ctr"/>
                       <a:r>
-                        <a:rPr sz="1600" b="0">
+                        <a:rPr sz="1500" b="0">
                           <a:solidFill>
                             <a:srgbClr val="1E293B"/>
                           </a:solidFill>
@@ -6201,12 +7822,12 @@
                     <a:p>
                       <a:pPr algn="ctr"/>
                       <a:r>
-                        <a:rPr sz="1600" b="1">
+                        <a:rPr sz="1500" b="1">
                           <a:solidFill>
                             <a:srgbClr val="1E293B"/>
                           </a:solidFill>
                         </a:rPr>
-                        <a:t>180.0 mm</a:t>
+                        <a:t>214.5 mm</a:t>
                       </a:r>
                     </a:p>
                   </a:txBody>
@@ -6223,12 +7844,12 @@
                     <a:p>
                       <a:pPr algn="ctr"/>
                       <a:r>
-                        <a:rPr sz="1600" b="0">
+                        <a:rPr sz="1500" b="0">
                           <a:solidFill>
                             <a:srgbClr val="1E293B"/>
                           </a:solidFill>
                         </a:rPr>
-                        <a:t>0.102</a:t>
+                        <a:t>0.189</a:t>
                       </a:r>
                     </a:p>
                   </a:txBody>
@@ -6245,12 +7866,12 @@
                     <a:p>
                       <a:pPr algn="ctr"/>
                       <a:r>
-                        <a:rPr sz="1600" b="0">
+                        <a:rPr sz="1500" b="0">
                           <a:solidFill>
                             <a:srgbClr val="1E293B"/>
                           </a:solidFill>
                         </a:rPr>
-                        <a:t>1.3 s</a:t>
+                        <a:t>—</a:t>
                       </a:r>
                     </a:p>
                   </a:txBody>
@@ -6267,7 +7888,7 @@
                     <a:p>
                       <a:pPr algn="ctr"/>
                       <a:r>
-                        <a:rPr sz="1600" b="0">
+                        <a:rPr sz="1500" b="0">
                           <a:solidFill>
                             <a:srgbClr val="1E293B"/>
                           </a:solidFill>
@@ -6291,12 +7912,12 @@
                     <a:p>
                       <a:pPr algn="ctr"/>
                       <a:r>
-                        <a:rPr sz="1600" b="1">
+                        <a:rPr sz="1500" b="1">
                           <a:solidFill>
                             <a:srgbClr val="166534"/>
                           </a:solidFill>
                         </a:rPr>
-                        <a:t>SA (1000 iter)</a:t>
+                        <a:t>SA final (2000 iter)</a:t>
                       </a:r>
                     </a:p>
                   </a:txBody>
@@ -6313,12 +7934,12 @@
                     <a:p>
                       <a:pPr algn="ctr"/>
                       <a:r>
-                        <a:rPr sz="1600" b="1">
+                        <a:rPr sz="1500" b="1">
                           <a:solidFill>
                             <a:srgbClr val="166534"/>
                           </a:solidFill>
                         </a:rPr>
-                        <a:t>155.0 mm</a:t>
+                        <a:t>181.5 mm</a:t>
                       </a:r>
                     </a:p>
                   </a:txBody>
@@ -6335,12 +7956,12 @@
                     <a:p>
                       <a:pPr algn="ctr"/>
                       <a:r>
-                        <a:rPr sz="1600" b="1">
+                        <a:rPr sz="1500" b="1">
                           <a:solidFill>
                             <a:srgbClr val="166534"/>
                           </a:solidFill>
                         </a:rPr>
-                        <a:t>0.118</a:t>
+                        <a:t>0.229</a:t>
                       </a:r>
                     </a:p>
                   </a:txBody>
@@ -6357,12 +7978,12 @@
                     <a:p>
                       <a:pPr algn="ctr"/>
                       <a:r>
-                        <a:rPr sz="1600" b="1">
+                        <a:rPr sz="1500" b="1">
                           <a:solidFill>
                             <a:srgbClr val="166534"/>
                           </a:solidFill>
                         </a:rPr>
-                        <a:t>506 s</a:t>
+                        <a:t>1.50 mm ✓</a:t>
                       </a:r>
                     </a:p>
                   </a:txBody>
@@ -6379,12 +8000,12 @@
                     <a:p>
                       <a:pPr algn="ctr"/>
                       <a:r>
-                        <a:rPr sz="1600" b="1">
+                        <a:rPr sz="1500" b="1">
                           <a:solidFill>
                             <a:srgbClr val="166534"/>
                           </a:solidFill>
                         </a:rPr>
-                        <a:t>sıra + duruş araması</a:t>
+                        <a:t>hibrit poz + sıra araması</a:t>
                       </a:r>
                     </a:p>
                   </a:txBody>
@@ -6403,12 +8024,12 @@
                     <a:p>
                       <a:pPr algn="ctr"/>
                       <a:r>
-                        <a:rPr sz="1600" b="0">
+                        <a:rPr sz="1500" b="0">
                           <a:solidFill>
                             <a:srgbClr val="1E293B"/>
                           </a:solidFill>
                         </a:rPr>
-                        <a:t>Hoca referansı</a:t>
+                        <a:t>Önceki 155 mm koşusu</a:t>
                       </a:r>
                     </a:p>
                   </a:txBody>
@@ -6425,12 +8046,12 @@
                     <a:p>
                       <a:pPr algn="ctr"/>
                       <a:r>
-                        <a:rPr sz="1600" b="1">
+                        <a:rPr sz="1500" b="1">
                           <a:solidFill>
                             <a:srgbClr val="1E293B"/>
                           </a:solidFill>
                         </a:rPr>
-                        <a:t>170 mm</a:t>
+                        <a:t>155.0 mm</a:t>
                       </a:r>
                     </a:p>
                   </a:txBody>
@@ -6447,12 +8068,12 @@
                     <a:p>
                       <a:pPr algn="ctr"/>
                       <a:r>
-                        <a:rPr sz="1600" b="0">
+                        <a:rPr sz="1500" b="0">
                           <a:solidFill>
                             <a:srgbClr val="1E293B"/>
                           </a:solidFill>
                         </a:rPr>
-                        <a:t>—</a:t>
+                        <a:t>0.118</a:t>
                       </a:r>
                     </a:p>
                   </a:txBody>
@@ -6469,12 +8090,12 @@
                     <a:p>
                       <a:pPr algn="ctr"/>
                       <a:r>
-                        <a:rPr sz="1600" b="0">
+                        <a:rPr sz="1500" b="0">
                           <a:solidFill>
-                            <a:srgbClr val="1E293B"/>
+                            <a:srgbClr val="B91C1C"/>
                           </a:solidFill>
                         </a:rPr>
-                        <a:t>—</a:t>
+                        <a:t>0.77 mm ✗</a:t>
                       </a:r>
                     </a:p>
                   </a:txBody>
@@ -6491,12 +8112,12 @@
                     <a:p>
                       <a:pPr algn="ctr"/>
                       <a:r>
-                        <a:rPr sz="1600" b="0">
+                        <a:rPr sz="1500" b="0">
                           <a:solidFill>
-                            <a:srgbClr val="1E293B"/>
+                            <a:srgbClr val="B91C1C"/>
                           </a:solidFill>
                         </a:rPr>
-                        <a:t>koşul teyidi gerekli</a:t>
+                        <a:t>350 taban, boşluksuz — GEÇERSİZ</a:t>
                       </a:r>
                     </a:p>
                   </a:txBody>
@@ -6520,7 +8141,7 @@
         <p:spPr>
           <a:xfrm>
             <a:off x="731520" y="4297680"/>
-            <a:ext cx="10698480" cy="1005840"/>
+            <a:ext cx="10698480" cy="914400"/>
           </a:xfrm>
           <a:prstGeom prst="rect">
             <a:avLst/>
@@ -6557,7 +8178,7 @@
                   <a:srgbClr val="166534"/>
                 </a:solidFill>
               </a:rPr>
-              <a:t>SA vs DBLF: −25.0 mm  (%13.9)        ·        SA vs hoca referansı (170 mm): −15.0 mm  (%8.8)</a:t>
+              <a:t>Yeni şartlar altında geçerli en iyi sonuç: 181.5 mm  ·  SA kazancı −33.0 mm  (%15.4)</a:t>
             </a:r>
           </a:p>
         </p:txBody>
@@ -6570,8 +8191,8 @@
         </p:nvSpPr>
         <p:spPr>
           <a:xfrm>
-            <a:off x="731520" y="5486400"/>
-            <a:ext cx="10698480" cy="1097280"/>
+            <a:off x="731520" y="5440680"/>
+            <a:ext cx="10698480" cy="1188720"/>
           </a:xfrm>
           <a:prstGeom prst="rect">
             <a:avLst/>
@@ -6608,7 +8229,7 @@
                   <a:srgbClr val="1E293B"/>
                 </a:solidFill>
               </a:rPr>
-              <a:t>Dürüst çerçeve: 170 mm referansının tabla boyutu / parça boşluğu / yöntem koşulları bilinmiyor — aynı koşullar teyit edilirse '15 mm daha iyi' iddiası kesinleşir. Bizim 155 mm voxel'e YUKARI yuvarlanmış üst sınırdır (gerçek tepe ≤ 155).</a:t>
+              <a:t>Dürüst çerçeve: önceki 155 mm sonucu hem 350 mm tabandaydı hem parça arası boşluk içermiyordu — sonradan ölçtük: 0.77 mm'lik İHLAL vardı. Yeni kurallarla kıyas geçersiz. 170 mm sözlü hedefi bu şartlarda ulaşılamadı; en yakın geçerli sonuç 181.5 mm (kısa plakanın dik boyu ~178 mm yapısal taban oluşturuyor).</a:t>
             </a:r>
           </a:p>
         </p:txBody>
@@ -6621,7 +8242,7 @@
 </p:sld>
 </file>
 
-<file path=ppt/slides/slide7.xml><?xml version="1.0" encoding="utf-8"?>
+<file path=ppt/slides/slide8.xml><?xml version="1.0" encoding="utf-8"?>
 <p:sld xmlns:a="http://schemas.openxmlformats.org/drawingml/2006/main" xmlns:p="http://schemas.openxmlformats.org/presentationml/2006/main" xmlns:r="http://schemas.openxmlformats.org/officeDocument/2006/relationships">
   <p:cSld>
     <p:bg>
@@ -6790,7 +8411,7 @@
 </p:sld>
 </file>
 
-<file path=ppt/slides/slide8.xml><?xml version="1.0" encoding="utf-8"?>
+<file path=ppt/slides/slide9.xml><?xml version="1.0" encoding="utf-8"?>
 <p:sld xmlns:a="http://schemas.openxmlformats.org/drawingml/2006/main" xmlns:p="http://schemas.openxmlformats.org/presentationml/2006/main" xmlns:r="http://schemas.openxmlformats.org/officeDocument/2006/relationships">
   <p:cSld>
     <p:bg>
@@ -7017,7 +8638,7 @@
                   <a:srgbClr val="059659"/>
                 </a:solidFill>
               </a:rPr>
-              <a:t>180.0 → 155.0 mm</a:t>
+              <a:t>214.5 → 181.5 mm</a:t>
             </a:r>
           </a:p>
           <a:p>
@@ -7032,7 +8653,7 @@
                   <a:srgbClr val="1E293B"/>
                 </a:solidFill>
               </a:rPr>
-              <a:t>•  Kazancın tamamı ilk ~60 iterasyonda — sonrası plato.</a:t>
+              <a:t>•  Kazancın motoru: kısa plakaları dik çevirme + plaka istif sırası hamleleri — SA bunları kabul ede ede tavanı söndürüyor.</a:t>
             </a:r>
           </a:p>
           <a:p>
@@ -7047,7 +8668,7 @@
                   <a:srgbClr val="1E293B"/>
                 </a:solidFill>
               </a:rPr>
-              <a:t>•  Voxel dünyasında iyileşme katman katman gelir (2.5 mm'lik basamaklar).</a:t>
+              <a:t>•  Üç seed (42/7/13) → 184.5 / 183.0 / 181.5: bant dar, strateji seed'e dayanıklı.</a:t>
             </a:r>
           </a:p>
           <a:p>
@@ -7062,301 +8683,7 @@
                   <a:srgbClr val="1E293B"/>
                 </a:solidFill>
               </a:rPr>
-              <a:t>•  Pratik sonuç: ~50 iterasyonluk koşu (≈30 sn) aynı sonucu verirdi — süre/kalite ayarı elimizde.</a:t>
-            </a:r>
-          </a:p>
-        </p:txBody>
-      </p:sp>
-    </p:spTree>
-  </p:cSld>
-  <p:clrMapOvr>
-    <a:masterClrMapping/>
-  </p:clrMapOvr>
-</p:sld>
-</file>
-
-<file path=ppt/slides/slide9.xml><?xml version="1.0" encoding="utf-8"?>
-<p:sld xmlns:a="http://schemas.openxmlformats.org/drawingml/2006/main" xmlns:p="http://schemas.openxmlformats.org/presentationml/2006/main" xmlns:r="http://schemas.openxmlformats.org/officeDocument/2006/relationships">
-  <p:cSld>
-    <p:bg>
-      <p:bgPr>
-        <a:solidFill>
-          <a:srgbClr val="F8FAFC"/>
-        </a:solidFill>
-        <a:effectLst/>
-      </p:bgPr>
-    </p:bg>
-    <p:spTree>
-      <p:nvGrpSpPr>
-        <p:cNvPr id="1" name=""/>
-        <p:cNvGrpSpPr/>
-        <p:nvPr/>
-      </p:nvGrpSpPr>
-      <p:grpSpPr/>
-      <p:sp>
-        <p:nvSpPr>
-          <p:cNvPr id="2" name="Rectangle 1"/>
-          <p:cNvSpPr/>
-          <p:nvPr/>
-        </p:nvSpPr>
-        <p:spPr>
-          <a:xfrm>
-            <a:off x="0" y="0"/>
-            <a:ext cx="12191695" cy="109728"/>
-          </a:xfrm>
-          <a:prstGeom prst="rect">
-            <a:avLst/>
-          </a:prstGeom>
-          <a:solidFill>
-            <a:srgbClr val="2563EB"/>
-          </a:solidFill>
-          <a:ln>
-            <a:noFill/>
-          </a:ln>
-        </p:spPr>
-        <p:style>
-          <a:lnRef idx="1">
-            <a:schemeClr val="accent1"/>
-          </a:lnRef>
-          <a:fillRef idx="3">
-            <a:schemeClr val="accent1"/>
-          </a:fillRef>
-          <a:effectRef idx="2">
-            <a:schemeClr val="accent1"/>
-          </a:effectRef>
-          <a:fontRef idx="minor">
-            <a:schemeClr val="lt1"/>
-          </a:fontRef>
-        </p:style>
-        <p:txBody>
-          <a:bodyPr rtlCol="0" anchor="ctr"/>
-          <a:lstStyle/>
-          <a:p>
-            <a:pPr algn="ctr"/>
-          </a:p>
-        </p:txBody>
-      </p:sp>
-      <p:sp>
-        <p:nvSpPr>
-          <p:cNvPr id="3" name="TextBox 2"/>
-          <p:cNvSpPr txBox="1"/>
-          <p:nvPr/>
-        </p:nvSpPr>
-        <p:spPr>
-          <a:xfrm>
-            <a:off x="640080" y="411480"/>
-            <a:ext cx="10972800" cy="914400"/>
-          </a:xfrm>
-          <a:prstGeom prst="rect">
-            <a:avLst/>
-          </a:prstGeom>
-          <a:noFill/>
-        </p:spPr>
-        <p:txBody>
-          <a:bodyPr wrap="square">
-            <a:spAutoFit/>
-          </a:bodyPr>
-          <a:lstStyle/>
-          <a:p>
-            <a:r>
-              <a:rPr sz="3200" b="1">
-                <a:solidFill>
-                  <a:srgbClr val="2563EB"/>
-                </a:solidFill>
-              </a:rPr>
-              <a:t>Çıktılar ve Kullanıma Hazırlık</a:t>
-            </a:r>
-          </a:p>
-        </p:txBody>
-      </p:sp>
-      <p:sp>
-        <p:nvSpPr>
-          <p:cNvPr id="4" name="Rectangle 3"/>
-          <p:cNvSpPr/>
-          <p:nvPr/>
-        </p:nvSpPr>
-        <p:spPr>
-          <a:xfrm>
-            <a:off x="658368" y="1325880"/>
-            <a:ext cx="6858000" cy="38100"/>
-          </a:xfrm>
-          <a:prstGeom prst="rect">
-            <a:avLst/>
-          </a:prstGeom>
-          <a:solidFill>
-            <a:srgbClr val="2563EB"/>
-          </a:solidFill>
-          <a:ln>
-            <a:noFill/>
-          </a:ln>
-        </p:spPr>
-        <p:style>
-          <a:lnRef idx="1">
-            <a:schemeClr val="accent1"/>
-          </a:lnRef>
-          <a:fillRef idx="3">
-            <a:schemeClr val="accent1"/>
-          </a:fillRef>
-          <a:effectRef idx="2">
-            <a:schemeClr val="accent1"/>
-          </a:effectRef>
-          <a:fontRef idx="minor">
-            <a:schemeClr val="lt1"/>
-          </a:fontRef>
-        </p:style>
-        <p:txBody>
-          <a:bodyPr rtlCol="0" anchor="ctr"/>
-          <a:lstStyle/>
-          <a:p>
-            <a:pPr algn="ctr"/>
-          </a:p>
-        </p:txBody>
-      </p:sp>
-      <p:sp>
-        <p:nvSpPr>
-          <p:cNvPr id="5" name="TextBox 4"/>
-          <p:cNvSpPr txBox="1"/>
-          <p:nvPr/>
-        </p:nvSpPr>
-        <p:spPr>
-          <a:xfrm>
-            <a:off x="731520" y="1691640"/>
-            <a:ext cx="10698480" cy="4572000"/>
-          </a:xfrm>
-          <a:prstGeom prst="rect">
-            <a:avLst/>
-          </a:prstGeom>
-          <a:noFill/>
-        </p:spPr>
-        <p:txBody>
-          <a:bodyPr wrap="square">
-            <a:spAutoFit/>
-          </a:bodyPr>
-          <a:lstStyle/>
-          <a:p>
-            <a:pPr>
-              <a:spcAft>
-                <a:spcPts val="1200"/>
-              </a:spcAft>
-            </a:pPr>
-            <a:r>
-              <a:rPr sz="2000" b="1">
-                <a:solidFill>
-                  <a:srgbClr val="059659"/>
-                </a:solidFill>
-              </a:rPr>
-              <a:t>•  Çözüm gerçek geometriye geri yazılıyor: results/numune_sa/nesting3d_result_numune.stl — slicer'da/3D Viewer'da açılabilir.</a:t>
-            </a:r>
-          </a:p>
-          <a:p>
-            <a:pPr>
-              <a:spcAft>
-                <a:spcPts val="1200"/>
-              </a:spcAft>
-            </a:pPr>
-            <a:r>
-              <a:rPr sz="2000" b="0">
-                <a:solidFill>
-                  <a:srgbClr val="1E293B"/>
-                </a:solidFill>
-              </a:rPr>
-              <a:t>•  Tek tık tekrar: DEMO_NUMUNE.bat — eksik paketleri kurar, iki koşuyu + karşılaştırma raporunu üretir (~10 dk).</a:t>
-            </a:r>
-          </a:p>
-          <a:p>
-            <a:pPr>
-              <a:spcAft>
-                <a:spcPts val="1200"/>
-              </a:spcAft>
-            </a:pPr>
-            <a:r>
-              <a:rPr sz="2000" b="0">
-                <a:solidFill>
-                  <a:srgbClr val="1E293B"/>
-                </a:solidFill>
-              </a:rPr>
-              <a:t>•  Parametrik: tabla boyutu (--plate), voxel inceliği (--pitch), parça arası boşluk (--margin), iterasyon (--iters) komut satırından.</a:t>
-            </a:r>
-          </a:p>
-          <a:p>
-            <a:pPr>
-              <a:spcAft>
-                <a:spcPts val="1200"/>
-              </a:spcAft>
-            </a:pPr>
-            <a:r>
-              <a:rPr sz="2000" b="0">
-                <a:solidFill>
-                  <a:srgbClr val="1E293B"/>
-                </a:solidFill>
-              </a:rPr>
-              <a:t>•  Farklı parça setleri: Numuneler/ klasörüne STL koymak + adet yazmak yeterli.</a:t>
-            </a:r>
-          </a:p>
-          <a:p>
-            <a:pPr>
-              <a:spcAft>
-                <a:spcPts val="1200"/>
-              </a:spcAft>
-            </a:pPr>
-            <a:r>
-              <a:rPr sz="2000" b="0">
-                <a:solidFill>
-                  <a:srgbClr val="1E293B"/>
-                </a:solidFill>
-              </a:rPr>
-              <a:t>•  Kod git'te sürümlü; rapor tabloları results/numune_comparison.md + numune_parts.csv.</a:t>
-            </a:r>
-          </a:p>
-        </p:txBody>
-      </p:sp>
-      <p:sp>
-        <p:nvSpPr>
-          <p:cNvPr id="6" name="Rectangle 5"/>
-          <p:cNvSpPr/>
-          <p:nvPr/>
-        </p:nvSpPr>
-        <p:spPr>
-          <a:xfrm>
-            <a:off x="731520" y="5303520"/>
-            <a:ext cx="10698480" cy="1005840"/>
-          </a:xfrm>
-          <a:prstGeom prst="rect">
-            <a:avLst/>
-          </a:prstGeom>
-          <a:solidFill>
-            <a:srgbClr val="FEF9C3"/>
-          </a:solidFill>
-          <a:ln>
-            <a:noFill/>
-          </a:ln>
-        </p:spPr>
-        <p:style>
-          <a:lnRef idx="1">
-            <a:schemeClr val="accent1"/>
-          </a:lnRef>
-          <a:fillRef idx="3">
-            <a:schemeClr val="accent1"/>
-          </a:fillRef>
-          <a:effectRef idx="2">
-            <a:schemeClr val="accent1"/>
-          </a:effectRef>
-          <a:fontRef idx="minor">
-            <a:schemeClr val="lt1"/>
-          </a:fontRef>
-        </p:style>
-        <p:txBody>
-          <a:bodyPr rtlCol="0" anchor="ctr" wrap="square" lIns="152400" tIns="101600"/>
-          <a:lstStyle/>
-          <a:p>
-            <a:pPr algn="ctr"/>
-            <a:r>
-              <a:rPr sz="1600" b="0">
-                <a:solidFill>
-                  <a:srgbClr val="1E293B"/>
-                </a:solidFill>
-              </a:rPr>
-              <a:t>Hoca kullanacaksa ihtiyaç listesi: Python 3.13 + pip (kurulumu bat hallediyor). Gerçek tabla boyutu ve parça arası boşluk kuralı netleşirse aynı gün yeniden koşulur.</a:t>
+              <a:t>•  2000 iterasyon ~93 dk; süre/kalite ayarı --iters ile elimizde.</a:t>
             </a:r>
           </a:p>
         </p:txBody>
